--- a/presentation-.pptx
+++ b/presentation-.pptx
@@ -817,7 +817,7 @@
                 <a:latin typeface="SRH Text"/>
                 <a:ea typeface="SRH"/>
               </a:rPr>
-              <a:t> </a:t>
+              <a:t>&lt;date/time&gt;</a:t>
             </a:r>
             <a:endParaRPr lang="en-US" sz="900" b="0" u="none" strike="noStrike">
               <a:solidFill>
@@ -897,7 +897,7 @@
                 <a:latin typeface="SRH Text"/>
                 <a:ea typeface="SRH"/>
               </a:rPr>
-              <a:t> </a:t>
+              <a:t>&lt;footer&gt;</a:t>
             </a:r>
             <a:endParaRPr lang="en-US" sz="900" b="0" u="none" strike="noStrike">
               <a:solidFill>
@@ -967,7 +967,7 @@
                 <a:tab pos="0" algn="l"/>
               </a:tabLst>
             </a:pPr>
-            <a:fld id="{A38D65D6-2C51-49B3-BA96-180EB995546A}" type="slidenum">
+            <a:fld id="{3A2911BB-DCE9-4E0E-A461-C2F8AC566CB6}" type="slidenum">
               <a:rPr lang="de-DE" sz="1550" b="1" u="none" strike="noStrike">
                 <a:solidFill>
                   <a:srgbClr val="6D7373"/>
@@ -977,7 +977,7 @@
                 <a:latin typeface="SRH Text"/>
                 <a:ea typeface="SRH"/>
               </a:rPr>
-              <a:t>22</a:t>
+              <a:t>&lt;number&gt;</a:t>
             </a:fld>
             <a:endParaRPr lang="en-US" sz="1550" b="0" u="none" strike="noStrike">
               <a:solidFill>
@@ -1796,7 +1796,7 @@
                 <a:latin typeface="SRH Text"/>
                 <a:ea typeface="SRH"/>
               </a:rPr>
-              <a:t> </a:t>
+              <a:t>&lt;date/time&gt;</a:t>
             </a:r>
             <a:endParaRPr lang="en-US" sz="900" b="0" u="none" strike="noStrike">
               <a:solidFill>
@@ -1876,7 +1876,7 @@
                 <a:latin typeface="SRH Text"/>
                 <a:ea typeface="SRH"/>
               </a:rPr>
-              <a:t> </a:t>
+              <a:t>&lt;footer&gt;</a:t>
             </a:r>
             <a:endParaRPr lang="en-US" sz="900" b="0" u="none" strike="noStrike">
               <a:solidFill>
@@ -1946,7 +1946,7 @@
                 <a:tab pos="0" algn="l"/>
               </a:tabLst>
             </a:pPr>
-            <a:fld id="{AA0B3321-C1CF-443A-8F1C-0C7DEAF42805}" type="slidenum">
+            <a:fld id="{CFEA5E6D-52B4-4E4D-BF28-BE7A47A88FDE}" type="slidenum">
               <a:rPr lang="de-DE" sz="1550" b="1" u="none" strike="noStrike">
                 <a:solidFill>
                   <a:srgbClr val="6D7373"/>
@@ -1956,7 +1956,7 @@
                 <a:latin typeface="SRH Text"/>
                 <a:ea typeface="SRH"/>
               </a:rPr>
-              <a:t>22</a:t>
+              <a:t>&lt;number&gt;</a:t>
             </a:fld>
             <a:endParaRPr lang="en-US" sz="1550" b="0" u="none" strike="noStrike">
               <a:solidFill>
@@ -3354,7 +3354,7 @@
                 <a:latin typeface="SRH Text"/>
                 <a:ea typeface="SRH"/>
               </a:rPr>
-              <a:t> </a:t>
+              <a:t>&lt;date/time&gt;</a:t>
             </a:r>
             <a:endParaRPr lang="en-US" sz="900" b="0" u="none" strike="noStrike">
               <a:solidFill>
@@ -3434,7 +3434,7 @@
                 <a:latin typeface="SRH Text"/>
                 <a:ea typeface="SRH"/>
               </a:rPr>
-              <a:t> </a:t>
+              <a:t>&lt;footer&gt;</a:t>
             </a:r>
             <a:endParaRPr lang="en-US" sz="900" b="0" u="none" strike="noStrike">
               <a:solidFill>
@@ -3504,7 +3504,7 @@
                 <a:tab pos="0" algn="l"/>
               </a:tabLst>
             </a:pPr>
-            <a:fld id="{DDC82622-4EB0-4FDC-ADD4-C5D8A580E73C}" type="slidenum">
+            <a:fld id="{2F39EF61-F72B-466A-9D00-50A69D368EEF}" type="slidenum">
               <a:rPr lang="de-DE" sz="1550" b="1" u="none" strike="noStrike">
                 <a:solidFill>
                   <a:srgbClr val="6D7373"/>
@@ -3514,7 +3514,7 @@
                 <a:latin typeface="SRH Text"/>
                 <a:ea typeface="SRH"/>
               </a:rPr>
-              <a:t>22</a:t>
+              <a:t>&lt;number&gt;</a:t>
             </a:fld>
             <a:endParaRPr lang="en-US" sz="1550" b="0" u="none" strike="noStrike">
               <a:solidFill>
@@ -5141,7 +5141,7 @@
                 <a:latin typeface="SRH Text"/>
                 <a:ea typeface="SRH"/>
               </a:rPr>
-              <a:t> </a:t>
+              <a:t>&lt;date/time&gt;</a:t>
             </a:r>
             <a:endParaRPr lang="en-US" sz="900" b="0" u="none" strike="noStrike">
               <a:solidFill>
@@ -5221,7 +5221,7 @@
                 <a:latin typeface="SRH Text"/>
                 <a:ea typeface="SRH"/>
               </a:rPr>
-              <a:t> </a:t>
+              <a:t>&lt;footer&gt;</a:t>
             </a:r>
             <a:endParaRPr lang="en-US" sz="900" b="0" u="none" strike="noStrike">
               <a:solidFill>
@@ -5291,7 +5291,7 @@
                 <a:tab pos="0" algn="l"/>
               </a:tabLst>
             </a:pPr>
-            <a:fld id="{169ACC3D-B4DD-4BF5-A70D-1F78809D7A48}" type="slidenum">
+            <a:fld id="{58B79C37-5F0F-4E6F-A930-732888013A2F}" type="slidenum">
               <a:rPr lang="de-DE" sz="1550" b="1" u="none" strike="noStrike">
                 <a:solidFill>
                   <a:srgbClr val="6D7373"/>
@@ -5301,7 +5301,7 @@
                 <a:latin typeface="SRH Text"/>
                 <a:ea typeface="SRH"/>
               </a:rPr>
-              <a:t>22</a:t>
+              <a:t>&lt;number&gt;</a:t>
             </a:fld>
             <a:endParaRPr lang="en-US" sz="1550" b="0" u="none" strike="noStrike">
               <a:solidFill>
@@ -6534,7 +6534,7 @@
                 <a:latin typeface="SRH Text"/>
                 <a:ea typeface="SRH"/>
               </a:rPr>
-              <a:t> </a:t>
+              <a:t>&lt;date/time&gt;</a:t>
             </a:r>
             <a:endParaRPr lang="en-US" sz="900" b="0" u="none" strike="noStrike">
               <a:solidFill>
@@ -6614,7 +6614,7 @@
                 <a:latin typeface="SRH Text"/>
                 <a:ea typeface="SRH"/>
               </a:rPr>
-              <a:t> </a:t>
+              <a:t>&lt;footer&gt;</a:t>
             </a:r>
             <a:endParaRPr lang="en-US" sz="900" b="0" u="none" strike="noStrike">
               <a:solidFill>
@@ -6684,7 +6684,7 @@
                 <a:tab pos="0" algn="l"/>
               </a:tabLst>
             </a:pPr>
-            <a:fld id="{80E0DFE9-3CAB-4A86-BBA4-9CCA36D45DA9}" type="slidenum">
+            <a:fld id="{10C2A2C5-430A-4226-BEFB-B345A174F9FA}" type="slidenum">
               <a:rPr lang="de-DE" sz="1550" b="1" u="none" strike="noStrike">
                 <a:solidFill>
                   <a:srgbClr val="6D7373"/>
@@ -6694,7 +6694,7 @@
                 <a:latin typeface="SRH Text"/>
                 <a:ea typeface="SRH"/>
               </a:rPr>
-              <a:t>22</a:t>
+              <a:t>&lt;number&gt;</a:t>
             </a:fld>
             <a:endParaRPr lang="en-US" sz="1550" b="0" u="none" strike="noStrike">
               <a:solidFill>
@@ -7970,7 +7970,7 @@
                 <a:latin typeface="SRH Text"/>
                 <a:ea typeface="SRH"/>
               </a:rPr>
-              <a:t> </a:t>
+              <a:t>&lt;date/time&gt;</a:t>
             </a:r>
             <a:endParaRPr lang="en-US" sz="900" b="0" u="none" strike="noStrike">
               <a:solidFill>
@@ -8050,7 +8050,7 @@
                 <a:latin typeface="SRH Text"/>
                 <a:ea typeface="SRH"/>
               </a:rPr>
-              <a:t> </a:t>
+              <a:t>&lt;footer&gt;</a:t>
             </a:r>
             <a:endParaRPr lang="en-US" sz="900" b="0" u="none" strike="noStrike">
               <a:solidFill>
@@ -8120,7 +8120,7 @@
                 <a:tab pos="0" algn="l"/>
               </a:tabLst>
             </a:pPr>
-            <a:fld id="{999A6509-3AF8-4541-ABEE-0492D92FD334}" type="slidenum">
+            <a:fld id="{2136502C-75C6-4304-A274-736ACEA6923F}" type="slidenum">
               <a:rPr lang="de-DE" sz="1550" b="1" u="none" strike="noStrike">
                 <a:solidFill>
                   <a:srgbClr val="6D7373"/>
@@ -8130,7 +8130,7 @@
                 <a:latin typeface="SRH Text"/>
                 <a:ea typeface="SRH"/>
               </a:rPr>
-              <a:t>22</a:t>
+              <a:t>&lt;number&gt;</a:t>
             </a:fld>
             <a:endParaRPr lang="en-US" sz="1550" b="0" u="none" strike="noStrike">
               <a:solidFill>
@@ -8992,7 +8992,7 @@
                 <a:latin typeface="SRH Text"/>
                 <a:ea typeface="SRH"/>
               </a:rPr>
-              <a:t> </a:t>
+              <a:t>&lt;date/time&gt;</a:t>
             </a:r>
             <a:endParaRPr lang="en-US" sz="900" b="0" u="none" strike="noStrike">
               <a:solidFill>
@@ -9072,7 +9072,7 @@
                 <a:latin typeface="SRH Text"/>
                 <a:ea typeface="SRH"/>
               </a:rPr>
-              <a:t> </a:t>
+              <a:t>&lt;footer&gt;</a:t>
             </a:r>
             <a:endParaRPr lang="en-US" sz="900" b="0" u="none" strike="noStrike">
               <a:solidFill>
@@ -9142,7 +9142,7 @@
                 <a:tab pos="0" algn="l"/>
               </a:tabLst>
             </a:pPr>
-            <a:fld id="{30A63C92-55B7-44F7-8EA9-607DE46A3325}" type="slidenum">
+            <a:fld id="{C8F3D899-76E8-4419-8319-864C29168880}" type="slidenum">
               <a:rPr lang="de-DE" sz="1550" b="1" u="none" strike="noStrike">
                 <a:solidFill>
                   <a:srgbClr val="6D7373"/>
@@ -9152,7 +9152,7 @@
                 <a:latin typeface="SRH Text"/>
                 <a:ea typeface="SRH"/>
               </a:rPr>
-              <a:t>22</a:t>
+              <a:t>&lt;number&gt;</a:t>
             </a:fld>
             <a:endParaRPr lang="en-US" sz="1550" b="0" u="none" strike="noStrike">
               <a:solidFill>
@@ -10624,7 +10624,7 @@
                 <a:latin typeface="SRH Text"/>
                 <a:ea typeface="SRH"/>
               </a:rPr>
-              <a:t> </a:t>
+              <a:t>&lt;date/time&gt;</a:t>
             </a:r>
             <a:endParaRPr lang="en-US" sz="900" b="0" u="none" strike="noStrike">
               <a:solidFill>
@@ -10704,7 +10704,7 @@
                 <a:latin typeface="SRH Text"/>
                 <a:ea typeface="SRH"/>
               </a:rPr>
-              <a:t> </a:t>
+              <a:t>&lt;footer&gt;</a:t>
             </a:r>
             <a:endParaRPr lang="en-US" sz="900" b="0" u="none" strike="noStrike">
               <a:solidFill>
@@ -10774,7 +10774,7 @@
                 <a:tab pos="0" algn="l"/>
               </a:tabLst>
             </a:pPr>
-            <a:fld id="{DA80855E-3581-42A0-B228-109D39B27696}" type="slidenum">
+            <a:fld id="{E8A6FA3D-1157-468F-B2A1-1A6B2707DC77}" type="slidenum">
               <a:rPr lang="de-DE" sz="1550" b="1" u="none" strike="noStrike">
                 <a:solidFill>
                   <a:srgbClr val="6D7373"/>
@@ -10784,7 +10784,7 @@
                 <a:latin typeface="SRH Text"/>
                 <a:ea typeface="SRH"/>
               </a:rPr>
-              <a:t>22</a:t>
+              <a:t>&lt;number&gt;</a:t>
             </a:fld>
             <a:endParaRPr lang="en-US" sz="1550" b="0" u="none" strike="noStrike">
               <a:solidFill>
@@ -12139,7 +12139,7 @@
                 <a:latin typeface="SRH Text"/>
                 <a:ea typeface="SRH"/>
               </a:rPr>
-              <a:t> </a:t>
+              <a:t>&lt;date/time&gt;</a:t>
             </a:r>
             <a:endParaRPr lang="en-US" sz="900" b="0" u="none" strike="noStrike">
               <a:solidFill>
@@ -12219,7 +12219,7 @@
                 <a:latin typeface="SRH Text"/>
                 <a:ea typeface="SRH"/>
               </a:rPr>
-              <a:t> </a:t>
+              <a:t>&lt;footer&gt;</a:t>
             </a:r>
             <a:endParaRPr lang="en-US" sz="900" b="0" u="none" strike="noStrike">
               <a:solidFill>
@@ -12289,7 +12289,7 @@
                 <a:tab pos="0" algn="l"/>
               </a:tabLst>
             </a:pPr>
-            <a:fld id="{E882B8D5-9DF2-4D8C-8CC9-93F9AA74793A}" type="slidenum">
+            <a:fld id="{6240E696-BCF3-49D7-ADD5-91185697D126}" type="slidenum">
               <a:rPr lang="de-DE" sz="1550" b="1" u="none" strike="noStrike">
                 <a:solidFill>
                   <a:srgbClr val="6D7373"/>
@@ -12299,7 +12299,7 @@
                 <a:latin typeface="SRH Text"/>
                 <a:ea typeface="SRH"/>
               </a:rPr>
-              <a:t>22</a:t>
+              <a:t>&lt;number&gt;</a:t>
             </a:fld>
             <a:endParaRPr lang="en-US" sz="1550" b="0" u="none" strike="noStrike">
               <a:solidFill>
@@ -13520,7 +13520,7 @@
                 <a:tab pos="0" algn="l"/>
               </a:tabLst>
             </a:pPr>
-            <a:fld id="{8079A253-4499-43F1-96CA-3C993D284E00}" type="slidenum">
+            <a:fld id="{474106C5-3E39-4BD1-AB9A-8EB931CD2822}" type="slidenum">
               <a:rPr lang="de-DE" sz="1550" b="1" u="none" strike="noStrike">
                 <a:solidFill>
                   <a:srgbClr val="6D7373"/>
@@ -13530,7 +13530,7 @@
                 <a:latin typeface="SRH Text"/>
                 <a:ea typeface="SRH"/>
               </a:rPr>
-              <a:t>22</a:t>
+              <a:t>&lt;number&gt;</a:t>
             </a:fld>
             <a:endParaRPr lang="en-US" sz="1550" b="0" u="none" strike="noStrike">
               <a:solidFill>
@@ -13610,7 +13610,7 @@
                 <a:latin typeface="SRH Text"/>
                 <a:ea typeface="SRH"/>
               </a:rPr>
-              <a:t> </a:t>
+              <a:t>&lt;footer&gt;</a:t>
             </a:r>
             <a:endParaRPr lang="en-US" sz="900" b="0" u="none" strike="noStrike">
               <a:solidFill>
@@ -13690,7 +13690,7 @@
                 <a:latin typeface="SRH Text"/>
                 <a:ea typeface="SRH"/>
               </a:rPr>
-              <a:t> </a:t>
+              <a:t>&lt;date/time&gt;</a:t>
             </a:r>
             <a:endParaRPr lang="en-US" sz="900" b="0" u="none" strike="noStrike">
               <a:solidFill>
@@ -18330,7 +18330,7 @@
                 <a:latin typeface="SRH Text"/>
                 <a:ea typeface="SRH"/>
               </a:rPr>
-              <a:t> </a:t>
+              <a:t>&lt;date/time&gt;</a:t>
             </a:r>
             <a:endParaRPr lang="en-US" sz="900" b="0" u="none" strike="noStrike">
               <a:solidFill>
@@ -18410,7 +18410,7 @@
                 <a:latin typeface="SRH Text"/>
                 <a:ea typeface="SRH"/>
               </a:rPr>
-              <a:t> </a:t>
+              <a:t>&lt;footer&gt;</a:t>
             </a:r>
             <a:endParaRPr lang="en-US" sz="900" b="0" u="none" strike="noStrike">
               <a:solidFill>
@@ -18480,7 +18480,7 @@
                 <a:tab pos="0" algn="l"/>
               </a:tabLst>
             </a:pPr>
-            <a:fld id="{54BC94B7-B2A9-43B1-8C70-7C511EE5CB02}" type="slidenum">
+            <a:fld id="{A4740307-9A25-4257-B095-F356CC51D203}" type="slidenum">
               <a:rPr lang="de-DE" sz="1550" b="1" u="none" strike="noStrike">
                 <a:solidFill>
                   <a:srgbClr val="6D7373"/>
@@ -18490,7 +18490,7 @@
                 <a:latin typeface="SRH Text"/>
                 <a:ea typeface="SRH"/>
               </a:rPr>
-              <a:t>22</a:t>
+              <a:t>&lt;number&gt;</a:t>
             </a:fld>
             <a:endParaRPr lang="en-US" sz="1550" b="0" u="none" strike="noStrike">
               <a:solidFill>
@@ -18779,7 +18779,7 @@
                 <a:latin typeface="SRH Text"/>
                 <a:ea typeface="SRH"/>
               </a:rPr>
-              <a:t> </a:t>
+              <a:t>&lt;date/time&gt;</a:t>
             </a:r>
             <a:endParaRPr lang="en-US" sz="900" b="0" u="none" strike="noStrike">
               <a:solidFill>
@@ -18859,7 +18859,7 @@
                 <a:latin typeface="SRH Text"/>
                 <a:ea typeface="SRH"/>
               </a:rPr>
-              <a:t> </a:t>
+              <a:t>&lt;footer&gt;</a:t>
             </a:r>
             <a:endParaRPr lang="en-US" sz="900" b="0" u="none" strike="noStrike">
               <a:solidFill>
@@ -18929,7 +18929,7 @@
                 <a:tab pos="0" algn="l"/>
               </a:tabLst>
             </a:pPr>
-            <a:fld id="{643FF7A7-53FB-40AF-8988-40917098C57B}" type="slidenum">
+            <a:fld id="{CD96D695-2760-40AB-AD4B-D9D0FAE281AF}" type="slidenum">
               <a:rPr lang="de-DE" sz="1550" b="1" u="none" strike="noStrike">
                 <a:solidFill>
                   <a:srgbClr val="6D7373"/>
@@ -18939,7 +18939,7 @@
                 <a:latin typeface="SRH Text"/>
                 <a:ea typeface="SRH"/>
               </a:rPr>
-              <a:t>22</a:t>
+              <a:t>&lt;number&gt;</a:t>
             </a:fld>
             <a:endParaRPr lang="en-US" sz="1550" b="0" u="none" strike="noStrike">
               <a:solidFill>
@@ -20342,7 +20342,7 @@
                 <a:latin typeface="SRH Text"/>
                 <a:ea typeface="SRH"/>
               </a:rPr>
-              <a:t> </a:t>
+              <a:t>&lt;date/time&gt;</a:t>
             </a:r>
             <a:endParaRPr lang="en-US" sz="900" b="0" u="none" strike="noStrike">
               <a:solidFill>
@@ -20422,7 +20422,7 @@
                 <a:latin typeface="SRH Text"/>
                 <a:ea typeface="SRH"/>
               </a:rPr>
-              <a:t> </a:t>
+              <a:t>&lt;footer&gt;</a:t>
             </a:r>
             <a:endParaRPr lang="en-US" sz="900" b="0" u="none" strike="noStrike">
               <a:solidFill>
@@ -20492,7 +20492,7 @@
                 <a:tab pos="0" algn="l"/>
               </a:tabLst>
             </a:pPr>
-            <a:fld id="{F41CE48A-1E61-47E9-ACE8-C3664765483F}" type="slidenum">
+            <a:fld id="{3801072E-8130-4110-AC42-68F7D7BF9959}" type="slidenum">
               <a:rPr lang="de-DE" sz="1550" b="1" u="none" strike="noStrike">
                 <a:solidFill>
                   <a:schemeClr val="lt1"/>
@@ -20502,7 +20502,7 @@
                 <a:latin typeface="SRH Text"/>
                 <a:ea typeface="SRH"/>
               </a:rPr>
-              <a:t>22</a:t>
+              <a:t>&lt;number&gt;</a:t>
             </a:fld>
             <a:endParaRPr lang="en-US" sz="1550" b="0" u="none" strike="noStrike">
               <a:solidFill>
@@ -21433,7 +21433,7 @@
                 <a:latin typeface="SRH Text"/>
                 <a:ea typeface="SRH"/>
               </a:rPr>
-              <a:t> </a:t>
+              <a:t>&lt;date/time&gt;</a:t>
             </a:r>
             <a:endParaRPr lang="en-US" sz="900" b="0" u="none" strike="noStrike">
               <a:solidFill>
@@ -21513,7 +21513,7 @@
                 <a:latin typeface="SRH Text"/>
                 <a:ea typeface="SRH"/>
               </a:rPr>
-              <a:t> </a:t>
+              <a:t>&lt;footer&gt;</a:t>
             </a:r>
             <a:endParaRPr lang="en-US" sz="900" b="0" u="none" strike="noStrike">
               <a:solidFill>
@@ -21583,7 +21583,7 @@
                 <a:tab pos="0" algn="l"/>
               </a:tabLst>
             </a:pPr>
-            <a:fld id="{73C812B7-D53A-46DC-BA60-CE55F352E336}" type="slidenum">
+            <a:fld id="{6BF6A060-307B-4B8F-B058-AFC18FB4DE58}" type="slidenum">
               <a:rPr lang="de-DE" sz="1550" b="1" u="none" strike="noStrike">
                 <a:solidFill>
                   <a:schemeClr val="lt1"/>
@@ -21593,7 +21593,7 @@
                 <a:latin typeface="SRH Text"/>
                 <a:ea typeface="SRH"/>
               </a:rPr>
-              <a:t>22</a:t>
+              <a:t>&lt;number&gt;</a:t>
             </a:fld>
             <a:endParaRPr lang="en-US" sz="1550" b="0" u="none" strike="noStrike">
               <a:solidFill>
@@ -22593,7 +22593,7 @@
                 <a:latin typeface="SRH Text"/>
                 <a:ea typeface="SRH"/>
               </a:rPr>
-              <a:t> </a:t>
+              <a:t>&lt;date/time&gt;</a:t>
             </a:r>
             <a:endParaRPr lang="en-US" sz="900" b="0" u="none" strike="noStrike">
               <a:solidFill>
@@ -22673,7 +22673,7 @@
                 <a:latin typeface="SRH Text"/>
                 <a:ea typeface="SRH"/>
               </a:rPr>
-              <a:t> </a:t>
+              <a:t>&lt;footer&gt;</a:t>
             </a:r>
             <a:endParaRPr lang="en-US" sz="900" b="0" u="none" strike="noStrike">
               <a:solidFill>
@@ -22743,7 +22743,7 @@
                 <a:tab pos="0" algn="l"/>
               </a:tabLst>
             </a:pPr>
-            <a:fld id="{312C0E83-E8BA-4119-956E-BC4F9899B88B}" type="slidenum">
+            <a:fld id="{6326E5F7-C249-41EE-B18D-E959DBE3DD16}" type="slidenum">
               <a:rPr lang="de-DE" sz="1550" b="1" u="none" strike="noStrike">
                 <a:solidFill>
                   <a:srgbClr val="6D7373"/>
@@ -22753,7 +22753,7 @@
                 <a:latin typeface="SRH Text"/>
                 <a:ea typeface="SRH"/>
               </a:rPr>
-              <a:t>22</a:t>
+              <a:t>&lt;number&gt;</a:t>
             </a:fld>
             <a:endParaRPr lang="en-US" sz="1550" b="0" u="none" strike="noStrike">
               <a:solidFill>
@@ -23202,7 +23202,7 @@
                 <a:latin typeface="SRH Text"/>
                 <a:ea typeface="SRH"/>
               </a:rPr>
-              <a:t> </a:t>
+              <a:t>&lt;date/time&gt;</a:t>
             </a:r>
             <a:endParaRPr lang="en-US" sz="900" b="0" u="none" strike="noStrike">
               <a:solidFill>
@@ -23282,7 +23282,7 @@
                 <a:latin typeface="SRH Text"/>
                 <a:ea typeface="SRH"/>
               </a:rPr>
-              <a:t> </a:t>
+              <a:t>&lt;footer&gt;</a:t>
             </a:r>
             <a:endParaRPr lang="en-US" sz="900" b="0" u="none" strike="noStrike">
               <a:solidFill>
@@ -23352,7 +23352,7 @@
                 <a:tab pos="0" algn="l"/>
               </a:tabLst>
             </a:pPr>
-            <a:fld id="{82C45527-BF71-4B89-8B2C-0DAE8BBA11B6}" type="slidenum">
+            <a:fld id="{B19E024D-9708-4E47-B283-504869DEAA0B}" type="slidenum">
               <a:rPr lang="de-DE" sz="1550" b="1" u="none" strike="noStrike">
                 <a:solidFill>
                   <a:schemeClr val="lt1"/>
@@ -23362,7 +23362,7 @@
                 <a:latin typeface="SRH Text"/>
                 <a:ea typeface="SRH"/>
               </a:rPr>
-              <a:t>22</a:t>
+              <a:t>&lt;number&gt;</a:t>
             </a:fld>
             <a:endParaRPr lang="en-US" sz="1550" b="0" u="none" strike="noStrike">
               <a:solidFill>
@@ -24023,7 +24023,7 @@
                 <a:latin typeface="SRH Text"/>
                 <a:ea typeface="SRH"/>
               </a:rPr>
-              <a:t> </a:t>
+              <a:t>&lt;date/time&gt;</a:t>
             </a:r>
             <a:endParaRPr lang="en-US" sz="900" b="0" u="none" strike="noStrike">
               <a:solidFill>
@@ -24103,7 +24103,7 @@
                 <a:latin typeface="SRH Text"/>
                 <a:ea typeface="SRH"/>
               </a:rPr>
-              <a:t> </a:t>
+              <a:t>&lt;footer&gt;</a:t>
             </a:r>
             <a:endParaRPr lang="en-US" sz="900" b="0" u="none" strike="noStrike">
               <a:solidFill>
@@ -24173,7 +24173,7 @@
                 <a:tab pos="0" algn="l"/>
               </a:tabLst>
             </a:pPr>
-            <a:fld id="{83087FF4-7B38-4A92-A73C-B9AFF9F96219}" type="slidenum">
+            <a:fld id="{65659BF2-B487-4D75-91A7-2184FE4C242B}" type="slidenum">
               <a:rPr lang="de-DE" sz="1550" b="1" u="none" strike="noStrike">
                 <a:solidFill>
                   <a:srgbClr val="6D7373"/>
@@ -24183,7 +24183,7 @@
                 <a:latin typeface="SRH Text"/>
                 <a:ea typeface="SRH"/>
               </a:rPr>
-              <a:t>22</a:t>
+              <a:t>&lt;number&gt;</a:t>
             </a:fld>
             <a:endParaRPr lang="en-US" sz="1550" b="0" u="none" strike="noStrike">
               <a:solidFill>
@@ -24642,7 +24642,7 @@
                 <a:latin typeface="SRH Text"/>
                 <a:ea typeface="SRH"/>
               </a:rPr>
-              <a:t> </a:t>
+              <a:t>&lt;date/time&gt;</a:t>
             </a:r>
             <a:endParaRPr lang="en-US" sz="900" b="0" u="none" strike="noStrike">
               <a:solidFill>
@@ -24722,7 +24722,7 @@
                 <a:latin typeface="SRH Text"/>
                 <a:ea typeface="SRH"/>
               </a:rPr>
-              <a:t> </a:t>
+              <a:t>&lt;footer&gt;</a:t>
             </a:r>
             <a:endParaRPr lang="en-US" sz="900" b="0" u="none" strike="noStrike">
               <a:solidFill>
@@ -24792,7 +24792,7 @@
                 <a:tab pos="0" algn="l"/>
               </a:tabLst>
             </a:pPr>
-            <a:fld id="{09E4DC7C-5FF6-4F76-8233-48BF5B5CAB9A}" type="slidenum">
+            <a:fld id="{1002A7A2-C1DF-46FE-8035-C8121229F2BE}" type="slidenum">
               <a:rPr lang="de-DE" sz="1550" b="1" u="none" strike="noStrike">
                 <a:solidFill>
                   <a:srgbClr val="6D7373"/>
@@ -24802,7 +24802,7 @@
                 <a:latin typeface="SRH Text"/>
                 <a:ea typeface="SRH"/>
               </a:rPr>
-              <a:t>22</a:t>
+              <a:t>&lt;number&gt;</a:t>
             </a:fld>
             <a:endParaRPr lang="en-US" sz="1550" b="0" u="none" strike="noStrike">
               <a:solidFill>
@@ -26035,7 +26035,7 @@
                 <a:latin typeface="SRH Text"/>
                 <a:ea typeface="SRH"/>
               </a:rPr>
-              <a:t> </a:t>
+              <a:t>&lt;date/time&gt;</a:t>
             </a:r>
             <a:endParaRPr lang="en-US" sz="900" b="0" u="none" strike="noStrike">
               <a:solidFill>
@@ -26115,7 +26115,7 @@
                 <a:latin typeface="SRH Text"/>
                 <a:ea typeface="SRH"/>
               </a:rPr>
-              <a:t> </a:t>
+              <a:t>&lt;footer&gt;</a:t>
             </a:r>
             <a:endParaRPr lang="en-US" sz="900" b="0" u="none" strike="noStrike">
               <a:solidFill>
@@ -26185,7 +26185,7 @@
                 <a:tab pos="0" algn="l"/>
               </a:tabLst>
             </a:pPr>
-            <a:fld id="{50528B57-17C0-42B9-B7C3-288C19E3F415}" type="slidenum">
+            <a:fld id="{BDDD5C67-481C-43E8-9992-8194DE1ADA23}" type="slidenum">
               <a:rPr lang="de-DE" sz="1550" b="1" u="none" strike="noStrike">
                 <a:solidFill>
                   <a:srgbClr val="6D7373"/>
@@ -26195,7 +26195,7 @@
                 <a:latin typeface="SRH Text"/>
                 <a:ea typeface="SRH"/>
               </a:rPr>
-              <a:t>22</a:t>
+              <a:t>&lt;number&gt;</a:t>
             </a:fld>
             <a:endParaRPr lang="en-US" sz="1550" b="0" u="none" strike="noStrike">
               <a:solidFill>
@@ -26820,8 +26820,8 @@
         </p:nvSpPr>
         <p:spPr>
           <a:xfrm rot="21561000">
-            <a:off x="453600" y="4151520"/>
-            <a:ext cx="6418080" cy="2930400"/>
+            <a:off x="448560" y="4151520"/>
+            <a:ext cx="6418080" cy="2020320"/>
           </a:xfrm>
           <a:prstGeom prst="rect">
             <a:avLst/>
@@ -27044,7 +27044,7 @@
                 <a:tab pos="0" algn="l"/>
               </a:tabLst>
             </a:pPr>
-            <a:fld id="{8AB0B1DF-9A9E-4394-956E-9741F5D7B1AC}" type="datetime1">
+            <a:fld id="{A204A7E4-8D31-4B36-B02F-48B84E7B0D0F}" type="datetime1">
               <a:rPr lang="en-CA" sz="900" b="1" u="none" strike="noStrike">
                 <a:solidFill>
                   <a:schemeClr val="lt1"/>
@@ -27054,7 +27054,7 @@
                 <a:latin typeface="SRH Text"/>
                 <a:ea typeface="SRH"/>
               </a:rPr>
-              <a:t>2026-08-13</a:t>
+              <a:t>2026-08-17</a:t>
             </a:fld>
             <a:endParaRPr lang="en-US" sz="900" b="0" u="none" strike="noStrike">
               <a:solidFill>
@@ -27204,7 +27204,7 @@
                 <a:tab pos="0" algn="l"/>
               </a:tabLst>
             </a:pPr>
-            <a:fld id="{B4F0FCF0-B3C1-4133-9304-CA01901B5EE5}" type="slidenum">
+            <a:fld id="{D82AAB3C-8F30-47F8-8F32-AEC39789EE86}" type="slidenum">
               <a:rPr lang="de-DE" sz="1550" b="1" u="none" strike="noStrike">
                 <a:solidFill>
                   <a:schemeClr val="lt1"/>
@@ -27214,7 +27214,7 @@
                 <a:latin typeface="SRH Text"/>
                 <a:ea typeface="SRH"/>
               </a:rPr>
-              <a:t>22</a:t>
+              <a:t>&lt;number&gt;</a:t>
             </a:fld>
             <a:endParaRPr lang="en-US" sz="1550" b="0" u="none" strike="noStrike">
               <a:solidFill>
@@ -27880,7 +27880,7 @@
                 <a:tab pos="0" algn="l"/>
               </a:tabLst>
             </a:pPr>
-            <a:fld id="{80256EF8-3B3E-44E5-9FE7-D28E8DB20600}" type="datetime1">
+            <a:fld id="{072DA86B-CC2E-4B73-ACF2-185B3CEA9BBD}" type="datetime1">
               <a:rPr lang="en-CA" sz="900" b="1" u="none" strike="noStrike">
                 <a:solidFill>
                   <a:srgbClr val="6D7373"/>
@@ -27890,7 +27890,7 @@
                 <a:latin typeface="SRH Text"/>
                 <a:ea typeface="SRH"/>
               </a:rPr>
-              <a:t>2026-08-13</a:t>
+              <a:t>2026-08-17</a:t>
             </a:fld>
             <a:endParaRPr lang="en-US" sz="900" b="0" u="none" strike="noStrike">
               <a:solidFill>
@@ -28040,7 +28040,7 @@
                 <a:tab pos="0" algn="l"/>
               </a:tabLst>
             </a:pPr>
-            <a:fld id="{BF375F78-8E28-4D32-A984-AD36FB5300D6}" type="slidenum">
+            <a:fld id="{0B898950-E708-405C-AB21-295A5A751F9C}" type="slidenum">
               <a:rPr lang="de-DE" sz="1550" b="1" u="none" strike="noStrike">
                 <a:solidFill>
                   <a:srgbClr val="6D7373"/>
@@ -28050,7 +28050,7 @@
                 <a:latin typeface="SRH Text"/>
                 <a:ea typeface="SRH"/>
               </a:rPr>
-              <a:t>22</a:t>
+              <a:t>&lt;number&gt;</a:t>
             </a:fld>
             <a:endParaRPr lang="en-US" sz="1550" b="0" u="none" strike="noStrike">
               <a:solidFill>
@@ -28651,7 +28651,7 @@
                 <a:tab pos="0" algn="l"/>
               </a:tabLst>
             </a:pPr>
-            <a:fld id="{FB37A4DC-F2E8-4231-BDBC-4EC8E4B762B6}" type="datetime1">
+            <a:fld id="{5E404667-6F93-4A9A-9BDD-64F0FA8F6C97}" type="datetime1">
               <a:rPr lang="en-CA" sz="900" b="1" u="none" strike="noStrike">
                 <a:solidFill>
                   <a:srgbClr val="6D7373"/>
@@ -28661,7 +28661,7 @@
                 <a:latin typeface="SRH Text"/>
                 <a:ea typeface="SRH"/>
               </a:rPr>
-              <a:t>2026-08-13</a:t>
+              <a:t>2026-08-17</a:t>
             </a:fld>
             <a:endParaRPr lang="en-US" sz="900" b="0" u="none" strike="noStrike">
               <a:solidFill>
@@ -28811,7 +28811,7 @@
                 <a:tab pos="0" algn="l"/>
               </a:tabLst>
             </a:pPr>
-            <a:fld id="{83DBFA34-3F75-43B3-8B60-F0DE2AEFFEEC}" type="slidenum">
+            <a:fld id="{C6AE2684-8FF8-4730-841C-5C55651FF969}" type="slidenum">
               <a:rPr lang="de-DE" sz="1550" b="1" u="none" strike="noStrike">
                 <a:solidFill>
                   <a:srgbClr val="6D7373"/>
@@ -28821,7 +28821,7 @@
                 <a:latin typeface="SRH Text"/>
                 <a:ea typeface="SRH"/>
               </a:rPr>
-              <a:t>22</a:t>
+              <a:t>&lt;number&gt;</a:t>
             </a:fld>
             <a:endParaRPr lang="en-US" sz="1550" b="0" u="none" strike="noStrike">
               <a:solidFill>
@@ -29127,7 +29127,7 @@
                 <a:tab pos="0" algn="l"/>
               </a:tabLst>
             </a:pPr>
-            <a:fld id="{6B4BF82D-95AD-487F-96FE-50EE20C333E2}" type="datetime1">
+            <a:fld id="{352F9340-6BF3-4B9C-A678-F92E6213E4F0}" type="datetime1">
               <a:rPr lang="en-CA" sz="900" b="1" u="none" strike="noStrike">
                 <a:solidFill>
                   <a:srgbClr val="6D7373"/>
@@ -29137,7 +29137,7 @@
                 <a:latin typeface="SRH Text"/>
                 <a:ea typeface="SRH"/>
               </a:rPr>
-              <a:t>2026-08-13</a:t>
+              <a:t>2026-08-17</a:t>
             </a:fld>
             <a:endParaRPr lang="en-US" sz="900" b="0" u="none" strike="noStrike">
               <a:solidFill>
@@ -29287,7 +29287,7 @@
                 <a:tab pos="0" algn="l"/>
               </a:tabLst>
             </a:pPr>
-            <a:fld id="{46506FE4-ADBA-43D3-906F-77DFE2A68188}" type="slidenum">
+            <a:fld id="{CFBC8181-BE76-4B83-B27A-A16A34E32BD9}" type="slidenum">
               <a:rPr lang="de-DE" sz="1550" b="1" u="none" strike="noStrike">
                 <a:solidFill>
                   <a:srgbClr val="6D7373"/>
@@ -29297,7 +29297,7 @@
                 <a:latin typeface="SRH Text"/>
                 <a:ea typeface="SRH"/>
               </a:rPr>
-              <a:t>22</a:t>
+              <a:t>&lt;number&gt;</a:t>
             </a:fld>
             <a:endParaRPr lang="en-US" sz="1550" b="0" u="none" strike="noStrike">
               <a:solidFill>
@@ -29865,7 +29865,7 @@
                 <a:tab pos="0" algn="l"/>
               </a:tabLst>
             </a:pPr>
-            <a:fld id="{C2E003AA-9F77-4BFA-A9C7-3C45AC2F1522}" type="datetime1">
+            <a:fld id="{1A616BF1-855F-4F79-8274-9FE235CB84A4}" type="datetime1">
               <a:rPr lang="en-CA" sz="900" b="1" u="none" strike="noStrike">
                 <a:solidFill>
                   <a:srgbClr val="6D7373"/>
@@ -29875,7 +29875,7 @@
                 <a:latin typeface="SRH Text"/>
                 <a:ea typeface="SRH"/>
               </a:rPr>
-              <a:t>2026-08-13</a:t>
+              <a:t>2026-08-17</a:t>
             </a:fld>
             <a:endParaRPr lang="en-US" sz="900" b="0" u="none" strike="noStrike">
               <a:solidFill>
@@ -30025,7 +30025,7 @@
                 <a:tab pos="0" algn="l"/>
               </a:tabLst>
             </a:pPr>
-            <a:fld id="{71DF46E0-7866-4D06-939B-C96A5377BC9F}" type="slidenum">
+            <a:fld id="{31975B64-5F48-4689-B27C-3A43756229C0}" type="slidenum">
               <a:rPr lang="de-DE" sz="1550" b="1" u="none" strike="noStrike">
                 <a:solidFill>
                   <a:srgbClr val="6D7373"/>
@@ -30035,7 +30035,7 @@
                 <a:latin typeface="SRH Text"/>
                 <a:ea typeface="SRH"/>
               </a:rPr>
-              <a:t>22</a:t>
+              <a:t>&lt;number&gt;</a:t>
             </a:fld>
             <a:endParaRPr lang="en-US" sz="1550" b="0" u="none" strike="noStrike">
               <a:solidFill>
@@ -30249,7 +30249,7 @@
                 <a:tab pos="0" algn="l"/>
               </a:tabLst>
             </a:pPr>
-            <a:fld id="{BEAE97B5-1802-4890-9645-6107161A2355}" type="datetime1">
+            <a:fld id="{8724293D-1CD5-4F8A-AB35-E96CE2918BCB}" type="datetime1">
               <a:rPr lang="en-CA" sz="900" b="1" u="none" strike="noStrike">
                 <a:solidFill>
                   <a:srgbClr val="6D7373"/>
@@ -30259,7 +30259,7 @@
                 <a:latin typeface="SRH Text"/>
                 <a:ea typeface="SRH"/>
               </a:rPr>
-              <a:t>2026-08-13</a:t>
+              <a:t>2026-08-17</a:t>
             </a:fld>
             <a:endParaRPr lang="en-US" sz="900" b="0" u="none" strike="noStrike">
               <a:solidFill>
@@ -30409,7 +30409,7 @@
                 <a:tab pos="0" algn="l"/>
               </a:tabLst>
             </a:pPr>
-            <a:fld id="{BB24CF92-8A2E-4704-A833-FF2E1E79C238}" type="slidenum">
+            <a:fld id="{BA651654-48AC-4960-B165-F6159D58D49C}" type="slidenum">
               <a:rPr lang="de-DE" sz="1550" b="1" u="none" strike="noStrike">
                 <a:solidFill>
                   <a:srgbClr val="6D7373"/>
@@ -30419,7 +30419,7 @@
                 <a:latin typeface="SRH Text"/>
                 <a:ea typeface="SRH"/>
               </a:rPr>
-              <a:t>22</a:t>
+              <a:t>&lt;number&gt;</a:t>
             </a:fld>
             <a:endParaRPr lang="en-US" sz="1550" b="0" u="none" strike="noStrike">
               <a:solidFill>
@@ -30922,7 +30922,7 @@
                 <a:tab pos="0" algn="l"/>
               </a:tabLst>
             </a:pPr>
-            <a:fld id="{5B08C96A-BC47-468D-8AEB-47E5B7D2504A}" type="datetime1">
+            <a:fld id="{A7A5393C-80EF-4FD1-AB3B-ED401E0AE3A1}" type="datetime1">
               <a:rPr lang="en-CA" sz="900" b="1" u="none" strike="noStrike">
                 <a:solidFill>
                   <a:srgbClr val="6D7373"/>
@@ -30932,7 +30932,7 @@
                 <a:latin typeface="SRH Text"/>
                 <a:ea typeface="SRH"/>
               </a:rPr>
-              <a:t>2026-08-13</a:t>
+              <a:t>2026-08-17</a:t>
             </a:fld>
             <a:endParaRPr lang="en-US" sz="900" b="0" u="none" strike="noStrike">
               <a:solidFill>
@@ -31082,7 +31082,7 @@
                 <a:tab pos="0" algn="l"/>
               </a:tabLst>
             </a:pPr>
-            <a:fld id="{DA7261F7-7444-4978-8A18-07EA55F4130E}" type="slidenum">
+            <a:fld id="{F189958D-4DB1-4C7D-BC25-784D98B8BEC5}" type="slidenum">
               <a:rPr lang="de-DE" sz="1550" b="1" u="none" strike="noStrike">
                 <a:solidFill>
                   <a:srgbClr val="6D7373"/>
@@ -31092,7 +31092,7 @@
                 <a:latin typeface="SRH Text"/>
                 <a:ea typeface="SRH"/>
               </a:rPr>
-              <a:t>22</a:t>
+              <a:t>&lt;number&gt;</a:t>
             </a:fld>
             <a:endParaRPr lang="en-US" sz="1550" b="0" u="none" strike="noStrike">
               <a:solidFill>
@@ -31731,7 +31731,7 @@
                 <a:tab pos="0" algn="l"/>
               </a:tabLst>
             </a:pPr>
-            <a:fld id="{C3E6CCF4-78C8-42E8-A8D2-FEF4CF9A7783}" type="datetime1">
+            <a:fld id="{F2D1CAE2-0618-44CC-A5D1-F079D07D16EF}" type="datetime1">
               <a:rPr lang="en-CA" sz="900" b="1" u="none" strike="noStrike">
                 <a:solidFill>
                   <a:srgbClr val="6D7373"/>
@@ -31741,7 +31741,7 @@
                 <a:latin typeface="SRH Text"/>
                 <a:ea typeface="SRH"/>
               </a:rPr>
-              <a:t>2026-08-13</a:t>
+              <a:t>2026-08-17</a:t>
             </a:fld>
             <a:endParaRPr lang="en-US" sz="900" b="0" u="none" strike="noStrike">
               <a:solidFill>
@@ -31891,7 +31891,7 @@
                 <a:tab pos="0" algn="l"/>
               </a:tabLst>
             </a:pPr>
-            <a:fld id="{715E6DC0-F324-4CCA-B147-2C56FE56E095}" type="slidenum">
+            <a:fld id="{37996F08-F949-4F3B-BA68-8E056404E3DB}" type="slidenum">
               <a:rPr lang="de-DE" sz="1550" b="1" u="none" strike="noStrike">
                 <a:solidFill>
                   <a:srgbClr val="6D7373"/>
@@ -31901,7 +31901,7 @@
                 <a:latin typeface="SRH Text"/>
                 <a:ea typeface="SRH"/>
               </a:rPr>
-              <a:t>22</a:t>
+              <a:t>&lt;number&gt;</a:t>
             </a:fld>
             <a:endParaRPr lang="en-US" sz="1550" b="0" u="none" strike="noStrike">
               <a:solidFill>
@@ -32425,7 +32425,7 @@
                 <a:tab pos="0" algn="l"/>
               </a:tabLst>
             </a:pPr>
-            <a:fld id="{1038BB51-4889-45C8-95B8-B4562741EFDA}" type="datetime1">
+            <a:fld id="{AE757DA9-66F1-45FF-BCD6-C1AD1273370E}" type="datetime1">
               <a:rPr lang="en-CA" sz="900" b="1" u="none" strike="noStrike">
                 <a:solidFill>
                   <a:srgbClr val="6D7373"/>
@@ -32435,7 +32435,7 @@
                 <a:latin typeface="SRH Text"/>
                 <a:ea typeface="SRH"/>
               </a:rPr>
-              <a:t>2026-08-13</a:t>
+              <a:t>2026-08-17</a:t>
             </a:fld>
             <a:endParaRPr lang="en-US" sz="900" b="0" u="none" strike="noStrike">
               <a:solidFill>
@@ -32585,7 +32585,7 @@
                 <a:tab pos="0" algn="l"/>
               </a:tabLst>
             </a:pPr>
-            <a:fld id="{AE916168-78CC-4183-AD48-AC4580665028}" type="slidenum">
+            <a:fld id="{593419F0-A9B4-42FE-BB86-8A15860A96A9}" type="slidenum">
               <a:rPr lang="de-DE" sz="1550" b="1" u="none" strike="noStrike">
                 <a:solidFill>
                   <a:srgbClr val="6D7373"/>
@@ -32595,7 +32595,7 @@
                 <a:latin typeface="SRH Text"/>
                 <a:ea typeface="SRH"/>
               </a:rPr>
-              <a:t>22</a:t>
+              <a:t>&lt;number&gt;</a:t>
             </a:fld>
             <a:endParaRPr lang="en-US" sz="1550" b="0" u="none" strike="noStrike">
               <a:solidFill>
@@ -33167,7 +33167,7 @@
                 <a:tab pos="0" algn="l"/>
               </a:tabLst>
             </a:pPr>
-            <a:fld id="{4B718817-496F-40A4-A98F-CD48FC16CDA0}" type="datetime1">
+            <a:fld id="{DB1F4773-5ADF-45FC-9760-47ADB744CA58}" type="datetime1">
               <a:rPr lang="en-CA" sz="900" b="1" u="none" strike="noStrike">
                 <a:solidFill>
                   <a:srgbClr val="6D7373"/>
@@ -33177,7 +33177,7 @@
                 <a:latin typeface="SRH Text"/>
                 <a:ea typeface="SRH"/>
               </a:rPr>
-              <a:t>2026-08-13</a:t>
+              <a:t>2026-08-17</a:t>
             </a:fld>
             <a:endParaRPr lang="en-US" sz="900" b="0" u="none" strike="noStrike">
               <a:solidFill>
@@ -33327,7 +33327,7 @@
                 <a:tab pos="0" algn="l"/>
               </a:tabLst>
             </a:pPr>
-            <a:fld id="{7112016E-97ED-4CDC-815C-4B1167FBE31C}" type="slidenum">
+            <a:fld id="{EDF91181-10FA-47E6-B841-F8DCAC70427A}" type="slidenum">
               <a:rPr lang="de-DE" sz="1550" b="1" u="none" strike="noStrike">
                 <a:solidFill>
                   <a:srgbClr val="6D7373"/>
@@ -33337,7 +33337,7 @@
                 <a:latin typeface="SRH Text"/>
                 <a:ea typeface="SRH"/>
               </a:rPr>
-              <a:t>22</a:t>
+              <a:t>&lt;number&gt;</a:t>
             </a:fld>
             <a:endParaRPr lang="en-US" sz="1550" b="0" u="none" strike="noStrike">
               <a:solidFill>
@@ -33416,8 +33416,8 @@
         </p:nvSpPr>
         <p:spPr>
           <a:xfrm>
-            <a:off x="191880" y="538560"/>
-            <a:ext cx="9155880" cy="604440"/>
+            <a:off x="191880" y="-147600"/>
+            <a:ext cx="9155880" cy="833040"/>
           </a:xfrm>
           <a:prstGeom prst="rect">
             <a:avLst/>
@@ -33436,50 +33436,26 @@
               <a:lnSpc>
                 <a:spcPct val="100000"/>
               </a:lnSpc>
-              <a:spcBef>
-                <a:spcPts val="1191"/>
-              </a:spcBef>
-              <a:spcAft>
-                <a:spcPts val="992"/>
-              </a:spcAft>
-              <a:buNone/>
-              <a:tabLst>
-                <a:tab pos="0" algn="l"/>
-              </a:tabLst>
-            </a:pPr>
-            <a:br>
-              <a:rPr sz="2600"/>
-            </a:br>
-            <a:r>
-              <a:rPr lang="en-US" sz="2600" b="1" u="none" strike="noStrike">
-                <a:solidFill>
-                  <a:srgbClr val="FF4000"/>
+              <a:buNone/>
+              <a:tabLst>
+                <a:tab pos="0" algn="l"/>
+              </a:tabLst>
+            </a:pPr>
+            <a:r>
+              <a:rPr lang="en-US" sz="3000" b="1" u="none" strike="noStrike">
+                <a:solidFill>
+                  <a:srgbClr val="DF4807"/>
                 </a:solidFill>
                 <a:effectLst/>
                 <a:uFillTx/>
                 <a:latin typeface="SRH Headline"/>
                 <a:ea typeface="SRH Headline"/>
               </a:rPr>
-              <a:t> </a:t>
-            </a:r>
-            <a:br>
-              <a:rPr sz="2600"/>
-            </a:br>
-            <a:r>
-              <a:rPr lang="en-US" sz="2600" b="1" u="none" strike="noStrike">
-                <a:solidFill>
-                  <a:srgbClr val="FF4000"/>
-                </a:solidFill>
-                <a:effectLst/>
-                <a:uFillTx/>
-                <a:latin typeface="SRH Headline"/>
-                <a:ea typeface="SRH Headline"/>
-              </a:rPr>
-              <a:t>   Class Imbalance</a:t>
-            </a:r>
-            <a:endParaRPr lang="de-DE" sz="2600" b="1" u="none" strike="noStrike">
-              <a:solidFill>
-                <a:srgbClr val="FF4000"/>
+              <a:t>Related Articles</a:t>
+            </a:r>
+            <a:endParaRPr lang="de-DE" sz="3000" b="1" u="none" strike="noStrike">
+              <a:solidFill>
+                <a:schemeClr val="dk1"/>
               </a:solidFill>
               <a:effectLst/>
               <a:uFillTx/>
@@ -33488,20 +33464,20 @@
           </a:p>
         </p:txBody>
       </p:sp>
-      <p:sp>
-        <p:nvSpPr>
-          <p:cNvPr id="279" name="PlaceHolder 2"/>
-          <p:cNvSpPr>
-            <a:spLocks noGrp="1"/>
-          </p:cNvSpPr>
-          <p:nvPr>
-            <p:ph/>
-          </p:nvPr>
-        </p:nvSpPr>
+      <p:pic>
+        <p:nvPicPr>
+          <p:cNvPr id="279" name=""/>
+          <p:cNvPicPr/>
+          <p:nvPr/>
+        </p:nvPicPr>
+        <p:blipFill>
+          <a:blip r:embed="rId1"/>
+          <a:stretch/>
+        </p:blipFill>
         <p:spPr>
           <a:xfrm>
-            <a:off x="228600" y="1333800"/>
-            <a:ext cx="10803600" cy="5066640"/>
+            <a:off x="2971800" y="3344400"/>
+            <a:ext cx="5486400" cy="3211920"/>
           </a:xfrm>
           <a:prstGeom prst="rect">
             <a:avLst/>
@@ -33511,52 +33487,10 @@
             <a:noFill/>
           </a:ln>
         </p:spPr>
-        <p:txBody>
-          <a:bodyPr numCol="1" spcCol="216000" lIns="0" tIns="0" rIns="0" bIns="0" anchor="t">
-            <a:noAutofit/>
-          </a:bodyPr>
-          <a:p>
-            <a:pPr marL="285840" indent="0" algn="l" defTabSz="914400">
-              <a:lnSpc>
-                <a:spcPct val="150000"/>
-              </a:lnSpc>
-              <a:spcBef>
-                <a:spcPts val="1191"/>
-              </a:spcBef>
-              <a:spcAft>
-                <a:spcPts val="992"/>
-              </a:spcAft>
-              <a:buNone/>
-              <a:tabLst>
-                <a:tab pos="0" algn="l"/>
-              </a:tabLst>
-            </a:pPr>
-            <a:r>
-              <a:rPr lang="en-US" sz="1300" b="0" u="none" strike="noStrike">
-                <a:solidFill>
-                  <a:srgbClr val="1C1C1C"/>
-                </a:solidFill>
-                <a:effectLst/>
-                <a:uFillTx/>
-                <a:latin typeface="SRH Text"/>
-                <a:ea typeface="SRH Text"/>
-              </a:rPr>
-              <a:t>The distribution of the target variable was examined to determine whether the dataset contains a significant class imbalance and whether imbalance-handling techniques are required.</a:t>
-            </a:r>
-            <a:endParaRPr lang="de-DE" sz="1300" b="0" u="none" strike="noStrike">
-              <a:solidFill>
-                <a:schemeClr val="dk1"/>
-              </a:solidFill>
-              <a:effectLst/>
-              <a:uFillTx/>
-              <a:latin typeface="SRH Text"/>
-            </a:endParaRPr>
-          </a:p>
-        </p:txBody>
-      </p:sp>
+      </p:pic>
       <p:sp>
         <p:nvSpPr>
-          <p:cNvPr id="280" name="PlaceHolder 3"/>
+          <p:cNvPr id="280" name="PlaceHolder 2"/>
           <p:cNvSpPr>
             <a:spLocks noGrp="1"/>
           </p:cNvSpPr>
@@ -33611,7 +33545,7 @@
                 <a:tab pos="0" algn="l"/>
               </a:tabLst>
             </a:pPr>
-            <a:fld id="{DCB06415-0F85-4D9E-9CB5-FE0DE5B10031}" type="datetime1">
+            <a:fld id="{5829D221-BD32-42E0-B0A8-CC78FE9F8503}" type="datetime1">
               <a:rPr lang="en-CA" sz="900" b="1" u="none" strike="noStrike">
                 <a:solidFill>
                   <a:srgbClr val="6D7373"/>
@@ -33621,7 +33555,7 @@
                 <a:latin typeface="SRH Text"/>
                 <a:ea typeface="SRH"/>
               </a:rPr>
-              <a:t>2026-08-13</a:t>
+              <a:t>2026-08-17</a:t>
             </a:fld>
             <a:endParaRPr lang="en-US" sz="900" b="0" u="none" strike="noStrike">
               <a:solidFill>
@@ -33636,7 +33570,7 @@
       </p:sp>
       <p:sp>
         <p:nvSpPr>
-          <p:cNvPr id="281" name="PlaceHolder 4"/>
+          <p:cNvPr id="281" name="PlaceHolder 3"/>
           <p:cNvSpPr>
             <a:spLocks noGrp="1"/>
           </p:cNvSpPr>
@@ -33716,7 +33650,7 @@
       </p:sp>
       <p:sp>
         <p:nvSpPr>
-          <p:cNvPr id="282" name="PlaceHolder 5"/>
+          <p:cNvPr id="282" name="PlaceHolder 4"/>
           <p:cNvSpPr>
             <a:spLocks noGrp="1"/>
           </p:cNvSpPr>
@@ -33771,7 +33705,7 @@
                 <a:tab pos="0" algn="l"/>
               </a:tabLst>
             </a:pPr>
-            <a:fld id="{53EA2BA1-5552-4F22-B500-BC557AC24764}" type="slidenum">
+            <a:fld id="{1E2901EE-AFCA-40A6-973B-360F711C3220}" type="slidenum">
               <a:rPr lang="de-DE" sz="1550" b="1" u="none" strike="noStrike">
                 <a:solidFill>
                   <a:srgbClr val="6D7373"/>
@@ -33781,7 +33715,7 @@
                 <a:latin typeface="SRH Text"/>
                 <a:ea typeface="SRH"/>
               </a:rPr>
-              <a:t>22</a:t>
+              <a:t>&lt;number&gt;</a:t>
             </a:fld>
             <a:endParaRPr lang="en-US" sz="1550" b="0" u="none" strike="noStrike">
               <a:solidFill>
@@ -33801,37 +33735,13 @@
           <p:nvPr/>
         </p:nvPicPr>
         <p:blipFill>
-          <a:blip r:embed="rId1"/>
-          <a:stretch/>
-        </p:blipFill>
-        <p:spPr>
-          <a:xfrm>
-            <a:off x="7315200" y="1371600"/>
-            <a:ext cx="4091040" cy="5028840"/>
-          </a:xfrm>
-          <a:prstGeom prst="rect">
-            <a:avLst/>
-          </a:prstGeom>
-          <a:noFill/>
-          <a:ln w="0">
-            <a:noFill/>
-          </a:ln>
-        </p:spPr>
-      </p:pic>
-      <p:pic>
-        <p:nvPicPr>
-          <p:cNvPr id="284" name=""/>
-          <p:cNvPicPr/>
-          <p:nvPr/>
-        </p:nvPicPr>
-        <p:blipFill>
           <a:blip r:embed="rId2"/>
           <a:stretch/>
         </p:blipFill>
         <p:spPr>
           <a:xfrm>
-            <a:off x="84600" y="1333800"/>
-            <a:ext cx="6758640" cy="2323440"/>
+            <a:off x="3200400" y="829800"/>
+            <a:ext cx="5486400" cy="2426040"/>
           </a:xfrm>
           <a:prstGeom prst="rect">
             <a:avLst/>
@@ -34375,7 +34285,7 @@
                 <a:tab pos="0" algn="l"/>
               </a:tabLst>
             </a:pPr>
-            <a:fld id="{46D7C75A-864D-4FC4-B6D9-6685F221EA84}" type="datetime1">
+            <a:fld id="{A018FD6E-68CE-4183-9FC0-B29853EFE009}" type="datetime1">
               <a:rPr lang="en-CA" sz="900" b="1" u="none" strike="noStrike">
                 <a:solidFill>
                   <a:srgbClr val="6D7373"/>
@@ -34385,7 +34295,7 @@
                 <a:latin typeface="SRH Text"/>
                 <a:ea typeface="SRH"/>
               </a:rPr>
-              <a:t>2026-08-13</a:t>
+              <a:t>2026-08-17</a:t>
             </a:fld>
             <a:endParaRPr lang="en-US" sz="900" b="0" u="none" strike="noStrike">
               <a:solidFill>
@@ -34535,7 +34445,7 @@
                 <a:tab pos="0" algn="l"/>
               </a:tabLst>
             </a:pPr>
-            <a:fld id="{FF61663E-BB1C-4B8C-B8A0-FE08C10B4B68}" type="slidenum">
+            <a:fld id="{1CA6749B-4C73-4B1F-8691-8BACBE30701B}" type="slidenum">
               <a:rPr lang="de-DE" sz="1550" b="1" u="none" strike="noStrike">
                 <a:solidFill>
                   <a:srgbClr val="6D7373"/>
@@ -34545,7 +34455,7 @@
                 <a:latin typeface="SRH Text"/>
                 <a:ea typeface="SRH"/>
               </a:rPr>
-              <a:t>22</a:t>
+              <a:t>&lt;number&gt;</a:t>
             </a:fld>
             <a:endParaRPr lang="en-US" sz="1550" b="0" u="none" strike="noStrike">
               <a:solidFill>
@@ -34590,7 +34500,7 @@
       </p:grpSpPr>
       <p:sp>
         <p:nvSpPr>
-          <p:cNvPr id="285" name="PlaceHolder 1"/>
+          <p:cNvPr id="284" name="PlaceHolder 1"/>
           <p:cNvSpPr>
             <a:spLocks noGrp="1"/>
           </p:cNvSpPr>
@@ -34600,8 +34510,8 @@
         </p:nvSpPr>
         <p:spPr>
           <a:xfrm>
-            <a:off x="191880" y="-147600"/>
-            <a:ext cx="9155880" cy="833040"/>
+            <a:off x="191880" y="228600"/>
+            <a:ext cx="9155880" cy="685800"/>
           </a:xfrm>
           <a:prstGeom prst="rect">
             <a:avLst/>
@@ -34620,24 +34530,36 @@
               <a:lnSpc>
                 <a:spcPct val="100000"/>
               </a:lnSpc>
-              <a:buNone/>
-              <a:tabLst>
-                <a:tab pos="0" algn="l"/>
-              </a:tabLst>
-            </a:pPr>
-            <a:r>
-              <a:rPr lang="en-US" sz="3000" b="1" u="none" strike="noStrike">
-                <a:solidFill>
-                  <a:srgbClr val="DF4807"/>
+              <a:spcBef>
+                <a:spcPts val="1191"/>
+              </a:spcBef>
+              <a:spcAft>
+                <a:spcPts val="992"/>
+              </a:spcAft>
+              <a:buNone/>
+              <a:tabLst>
+                <a:tab pos="0" algn="l"/>
+              </a:tabLst>
+            </a:pPr>
+            <a:br>
+              <a:rPr sz="1800"/>
+            </a:br>
+            <a:r>
+              <a:rPr lang="de-DE" sz="1800" b="1" u="none" strike="noStrike">
+                <a:solidFill>
+                  <a:srgbClr val="FF4000"/>
                 </a:solidFill>
                 <a:effectLst/>
                 <a:uFillTx/>
                 <a:latin typeface="SRH Headline"/>
                 <a:ea typeface="SRH Headline"/>
               </a:rPr>
-              <a:t>Related Articles</a:t>
-            </a:r>
-            <a:endParaRPr lang="de-DE" sz="3000" b="1" u="none" strike="noStrike">
+              <a:t>Machine Learning Model Development &amp; Cost-Sensitive Optimization</a:t>
+            </a:r>
+            <a:br>
+              <a:rPr sz="1800"/>
+            </a:br>
+            <a:endParaRPr lang="de-DE" sz="1800" b="1" u="none" strike="noStrike">
               <a:solidFill>
                 <a:schemeClr val="dk1"/>
               </a:solidFill>
@@ -34648,20 +34570,20 @@
           </a:p>
         </p:txBody>
       </p:sp>
-      <p:pic>
-        <p:nvPicPr>
-          <p:cNvPr id="286" name=""/>
-          <p:cNvPicPr/>
-          <p:nvPr/>
-        </p:nvPicPr>
-        <p:blipFill>
-          <a:blip r:embed="rId1"/>
-          <a:stretch/>
-        </p:blipFill>
+      <p:sp>
+        <p:nvSpPr>
+          <p:cNvPr id="285" name="PlaceHolder 2"/>
+          <p:cNvSpPr>
+            <a:spLocks noGrp="1"/>
+          </p:cNvSpPr>
+          <p:nvPr>
+            <p:ph/>
+          </p:nvPr>
+        </p:nvSpPr>
         <p:spPr>
           <a:xfrm>
-            <a:off x="2971800" y="3344400"/>
-            <a:ext cx="5486400" cy="3211920"/>
+            <a:off x="228600" y="914400"/>
+            <a:ext cx="11201040" cy="6857640"/>
           </a:xfrm>
           <a:prstGeom prst="rect">
             <a:avLst/>
@@ -34671,10 +34593,388 @@
             <a:noFill/>
           </a:ln>
         </p:spPr>
-      </p:pic>
+        <p:txBody>
+          <a:bodyPr numCol="1" spcCol="216000" lIns="0" tIns="0" rIns="0" bIns="0" anchor="t">
+            <a:noAutofit/>
+          </a:bodyPr>
+          <a:p>
+            <a:pPr marL="285840" indent="0" algn="l" defTabSz="914400">
+              <a:lnSpc>
+                <a:spcPct val="150000"/>
+              </a:lnSpc>
+              <a:spcBef>
+                <a:spcPts val="1191"/>
+              </a:spcBef>
+              <a:spcAft>
+                <a:spcPts val="992"/>
+              </a:spcAft>
+              <a:buNone/>
+              <a:tabLst>
+                <a:tab pos="0" algn="l"/>
+              </a:tabLst>
+            </a:pPr>
+            <a:r>
+              <a:rPr lang="en-US" sz="1400" b="0" u="none" strike="noStrike">
+                <a:solidFill>
+                  <a:srgbClr val="1C1C1C"/>
+                </a:solidFill>
+                <a:effectLst/>
+                <a:uFillTx/>
+                <a:latin typeface="SRH Text"/>
+                <a:ea typeface="SRH Text"/>
+              </a:rPr>
+              <a:t>Algorithm: XGBoost (Extreme Gradient Boosting) </a:t>
+            </a:r>
+            <a:endParaRPr lang="de-DE" sz="1400" b="0" u="none" strike="noStrike">
+              <a:solidFill>
+                <a:schemeClr val="dk1"/>
+              </a:solidFill>
+              <a:effectLst/>
+              <a:uFillTx/>
+              <a:latin typeface="SRH Text"/>
+            </a:endParaRPr>
+          </a:p>
+          <a:p>
+            <a:pPr marL="285840" indent="-285840" algn="l" defTabSz="914400">
+              <a:lnSpc>
+                <a:spcPct val="150000"/>
+              </a:lnSpc>
+              <a:spcBef>
+                <a:spcPts val="1191"/>
+              </a:spcBef>
+              <a:spcAft>
+                <a:spcPts val="992"/>
+              </a:spcAft>
+              <a:buClr>
+                <a:srgbClr val="575756"/>
+              </a:buClr>
+              <a:buFont typeface="Wingdings" charset="2"/>
+              <a:buChar char=""/>
+              <a:tabLst>
+                <a:tab pos="0" algn="l"/>
+              </a:tabLst>
+            </a:pPr>
+            <a:r>
+              <a:rPr lang="en-US" sz="1400" b="0" u="none" strike="noStrike">
+                <a:solidFill>
+                  <a:srgbClr val="1C1C1C"/>
+                </a:solidFill>
+                <a:effectLst/>
+                <a:uFillTx/>
+                <a:latin typeface="SRH Text"/>
+                <a:ea typeface="SRH Text"/>
+              </a:rPr>
+              <a:t>Data Split: </a:t>
+            </a:r>
+            <a:r>
+              <a:rPr lang="en-US" sz="1400" b="1" u="none" strike="noStrike">
+                <a:solidFill>
+                  <a:srgbClr val="1C1C1C"/>
+                </a:solidFill>
+                <a:effectLst/>
+                <a:uFillTx/>
+                <a:latin typeface="SRH Text"/>
+                <a:ea typeface="SRH Text"/>
+              </a:rPr>
+              <a:t>80% Training | 10% Validation | 10% Test </a:t>
+            </a:r>
+            <a:endParaRPr lang="de-DE" sz="1400" b="0" u="none" strike="noStrike">
+              <a:solidFill>
+                <a:schemeClr val="dk1"/>
+              </a:solidFill>
+              <a:effectLst/>
+              <a:uFillTx/>
+              <a:latin typeface="SRH Text"/>
+            </a:endParaRPr>
+          </a:p>
+          <a:p>
+            <a:pPr marL="285840" indent="-285840" algn="l" defTabSz="914400">
+              <a:lnSpc>
+                <a:spcPct val="150000"/>
+              </a:lnSpc>
+              <a:spcBef>
+                <a:spcPts val="1191"/>
+              </a:spcBef>
+              <a:spcAft>
+                <a:spcPts val="992"/>
+              </a:spcAft>
+              <a:buClr>
+                <a:srgbClr val="575756"/>
+              </a:buClr>
+              <a:buFont typeface="Wingdings" charset="2"/>
+              <a:buChar char=""/>
+              <a:tabLst>
+                <a:tab pos="0" algn="l"/>
+              </a:tabLst>
+            </a:pPr>
+            <a:r>
+              <a:rPr lang="en-US" sz="1400" b="0" u="none" strike="noStrike">
+                <a:solidFill>
+                  <a:srgbClr val="1C1C1C"/>
+                </a:solidFill>
+                <a:effectLst/>
+                <a:uFillTx/>
+                <a:latin typeface="SRH Text"/>
+                <a:ea typeface="SRH Text"/>
+              </a:rPr>
+              <a:t>Class Imbalance: Class weights applied during training </a:t>
+            </a:r>
+            <a:endParaRPr lang="de-DE" sz="1400" b="0" u="none" strike="noStrike">
+              <a:solidFill>
+                <a:schemeClr val="dk1"/>
+              </a:solidFill>
+              <a:effectLst/>
+              <a:uFillTx/>
+              <a:latin typeface="SRH Text"/>
+            </a:endParaRPr>
+          </a:p>
+          <a:p>
+            <a:pPr marL="285840" indent="-285840" algn="l" defTabSz="914400">
+              <a:lnSpc>
+                <a:spcPct val="150000"/>
+              </a:lnSpc>
+              <a:spcBef>
+                <a:spcPts val="1191"/>
+              </a:spcBef>
+              <a:spcAft>
+                <a:spcPts val="992"/>
+              </a:spcAft>
+              <a:buClr>
+                <a:srgbClr val="575756"/>
+              </a:buClr>
+              <a:buFont typeface="Wingdings" charset="2"/>
+              <a:buChar char=""/>
+              <a:tabLst>
+                <a:tab pos="0" algn="l"/>
+              </a:tabLst>
+            </a:pPr>
+            <a:r>
+              <a:rPr lang="en-US" sz="1400" b="0" u="none" strike="noStrike">
+                <a:solidFill>
+                  <a:srgbClr val="1C1C1C"/>
+                </a:solidFill>
+                <a:effectLst/>
+                <a:uFillTx/>
+                <a:latin typeface="SRH Text"/>
+                <a:ea typeface="SRH Text"/>
+              </a:rPr>
+              <a:t>Hyperparameter Optimization: Grid Search </a:t>
+            </a:r>
+            <a:endParaRPr lang="de-DE" sz="1400" b="0" u="none" strike="noStrike">
+              <a:solidFill>
+                <a:schemeClr val="dk1"/>
+              </a:solidFill>
+              <a:effectLst/>
+              <a:uFillTx/>
+              <a:latin typeface="SRH Text"/>
+            </a:endParaRPr>
+          </a:p>
+          <a:p>
+            <a:pPr marL="285840" indent="-285840" algn="l" defTabSz="914400">
+              <a:lnSpc>
+                <a:spcPct val="150000"/>
+              </a:lnSpc>
+              <a:spcBef>
+                <a:spcPts val="1191"/>
+              </a:spcBef>
+              <a:spcAft>
+                <a:spcPts val="992"/>
+              </a:spcAft>
+              <a:buClr>
+                <a:srgbClr val="575756"/>
+              </a:buClr>
+              <a:buFont typeface="Wingdings" charset="2"/>
+              <a:buChar char=""/>
+              <a:tabLst>
+                <a:tab pos="0" algn="l"/>
+              </a:tabLst>
+            </a:pPr>
+            <a:r>
+              <a:rPr lang="en-US" sz="1400" b="0" u="none" strike="noStrike">
+                <a:solidFill>
+                  <a:srgbClr val="1C1C1C"/>
+                </a:solidFill>
+                <a:effectLst/>
+                <a:uFillTx/>
+                <a:latin typeface="SRH Text"/>
+                <a:ea typeface="SRH Text"/>
+              </a:rPr>
+              <a:t>n_estimators: [200, 300, 400, 500,600,700] </a:t>
+            </a:r>
+            <a:endParaRPr lang="de-DE" sz="1400" b="0" u="none" strike="noStrike">
+              <a:solidFill>
+                <a:schemeClr val="dk1"/>
+              </a:solidFill>
+              <a:effectLst/>
+              <a:uFillTx/>
+              <a:latin typeface="SRH Text"/>
+            </a:endParaRPr>
+          </a:p>
+          <a:p>
+            <a:pPr marL="285840" indent="-285840" algn="l" defTabSz="914400">
+              <a:lnSpc>
+                <a:spcPct val="150000"/>
+              </a:lnSpc>
+              <a:spcBef>
+                <a:spcPts val="1191"/>
+              </a:spcBef>
+              <a:spcAft>
+                <a:spcPts val="992"/>
+              </a:spcAft>
+              <a:buClr>
+                <a:srgbClr val="575756"/>
+              </a:buClr>
+              <a:buFont typeface="Wingdings" charset="2"/>
+              <a:buChar char=""/>
+              <a:tabLst>
+                <a:tab pos="0" algn="l"/>
+              </a:tabLst>
+            </a:pPr>
+            <a:r>
+              <a:rPr lang="en-US" sz="1400" b="0" u="none" strike="noStrike">
+                <a:solidFill>
+                  <a:srgbClr val="1C1C1C"/>
+                </a:solidFill>
+                <a:effectLst/>
+                <a:uFillTx/>
+                <a:latin typeface="SRH Text"/>
+                <a:ea typeface="SRH Text"/>
+              </a:rPr>
+              <a:t>learning_rate: [0.03, 0.05, 0.07, 0.1 ,0.2, 0.3] </a:t>
+            </a:r>
+            <a:endParaRPr lang="de-DE" sz="1400" b="0" u="none" strike="noStrike">
+              <a:solidFill>
+                <a:schemeClr val="dk1"/>
+              </a:solidFill>
+              <a:effectLst/>
+              <a:uFillTx/>
+              <a:latin typeface="SRH Text"/>
+            </a:endParaRPr>
+          </a:p>
+          <a:p>
+            <a:pPr marL="285840" indent="-285840" algn="l" defTabSz="914400">
+              <a:lnSpc>
+                <a:spcPct val="150000"/>
+              </a:lnSpc>
+              <a:spcBef>
+                <a:spcPts val="1191"/>
+              </a:spcBef>
+              <a:spcAft>
+                <a:spcPts val="992"/>
+              </a:spcAft>
+              <a:buClr>
+                <a:srgbClr val="575756"/>
+              </a:buClr>
+              <a:buFont typeface="Wingdings" charset="2"/>
+              <a:buChar char=""/>
+              <a:tabLst>
+                <a:tab pos="0" algn="l"/>
+              </a:tabLst>
+            </a:pPr>
+            <a:r>
+              <a:rPr lang="en-US" sz="1400" b="0" u="none" strike="noStrike">
+                <a:solidFill>
+                  <a:srgbClr val="1C1C1C"/>
+                </a:solidFill>
+                <a:effectLst/>
+                <a:uFillTx/>
+                <a:latin typeface="SRH Text"/>
+                <a:ea typeface="SRH Text"/>
+              </a:rPr>
+              <a:t>max_depth: [3, 4, 5, 6,7,8] </a:t>
+            </a:r>
+            <a:endParaRPr lang="de-DE" sz="1400" b="0" u="none" strike="noStrike">
+              <a:solidFill>
+                <a:schemeClr val="dk1"/>
+              </a:solidFill>
+              <a:effectLst/>
+              <a:uFillTx/>
+              <a:latin typeface="SRH Text"/>
+            </a:endParaRPr>
+          </a:p>
+          <a:p>
+            <a:pPr marL="285840" indent="-285840" algn="l" defTabSz="914400">
+              <a:lnSpc>
+                <a:spcPct val="150000"/>
+              </a:lnSpc>
+              <a:spcBef>
+                <a:spcPts val="1191"/>
+              </a:spcBef>
+              <a:spcAft>
+                <a:spcPts val="992"/>
+              </a:spcAft>
+              <a:buClr>
+                <a:srgbClr val="575756"/>
+              </a:buClr>
+              <a:buFont typeface="Wingdings" charset="2"/>
+              <a:buChar char=""/>
+              <a:tabLst>
+                <a:tab pos="0" algn="l"/>
+              </a:tabLst>
+            </a:pPr>
+            <a:r>
+              <a:rPr lang="en-US" sz="1400" b="0" u="none" strike="noStrike">
+                <a:solidFill>
+                  <a:srgbClr val="1C1C1C"/>
+                </a:solidFill>
+                <a:effectLst/>
+                <a:uFillTx/>
+                <a:latin typeface="SRH Text"/>
+                <a:ea typeface="SRH Text"/>
+              </a:rPr>
+              <a:t>min_child_weight: [1, 3, 5, 7, 9] </a:t>
+            </a:r>
+            <a:endParaRPr lang="de-DE" sz="1400" b="0" u="none" strike="noStrike">
+              <a:solidFill>
+                <a:schemeClr val="dk1"/>
+              </a:solidFill>
+              <a:effectLst/>
+              <a:uFillTx/>
+              <a:latin typeface="SRH Text"/>
+            </a:endParaRPr>
+          </a:p>
+          <a:p>
+            <a:pPr marL="285840" indent="0" algn="l" defTabSz="914400">
+              <a:lnSpc>
+                <a:spcPct val="150000"/>
+              </a:lnSpc>
+              <a:spcBef>
+                <a:spcPts val="1191"/>
+              </a:spcBef>
+              <a:spcAft>
+                <a:spcPts val="992"/>
+              </a:spcAft>
+              <a:buNone/>
+              <a:tabLst>
+                <a:tab pos="0" algn="l"/>
+              </a:tabLst>
+            </a:pPr>
+            <a:r>
+              <a:rPr lang="en-US" sz="1400" b="0" u="none" strike="noStrike">
+                <a:solidFill>
+                  <a:srgbClr val="1C1C1C"/>
+                </a:solidFill>
+                <a:effectLst/>
+                <a:uFillTx/>
+                <a:latin typeface="SRH Text"/>
+                <a:ea typeface="SRH Text"/>
+              </a:rPr>
+              <a:t>Total: 256 XGBoost configurations evaluated </a:t>
+            </a:r>
+            <a:endParaRPr lang="de-DE" sz="1400" b="0" u="none" strike="noStrike">
+              <a:solidFill>
+                <a:schemeClr val="dk1"/>
+              </a:solidFill>
+              <a:effectLst/>
+              <a:uFillTx/>
+              <a:latin typeface="SRH Text"/>
+            </a:endParaRPr>
+          </a:p>
+        </p:txBody>
+      </p:sp>
       <p:sp>
         <p:nvSpPr>
-          <p:cNvPr id="287" name="PlaceHolder 2"/>
+          <p:cNvPr id="286" name="PlaceHolder 3"/>
           <p:cNvSpPr>
             <a:spLocks noGrp="1"/>
           </p:cNvSpPr>
@@ -34729,7 +35029,7 @@
                 <a:tab pos="0" algn="l"/>
               </a:tabLst>
             </a:pPr>
-            <a:fld id="{5ABD7934-6300-4FA1-8339-77C8E08DE849}" type="datetime1">
+            <a:fld id="{000B19F9-4A7C-4072-B754-82E899476211}" type="datetime1">
               <a:rPr lang="en-CA" sz="900" b="1" u="none" strike="noStrike">
                 <a:solidFill>
                   <a:srgbClr val="6D7373"/>
@@ -34739,7 +35039,7 @@
                 <a:latin typeface="SRH Text"/>
                 <a:ea typeface="SRH"/>
               </a:rPr>
-              <a:t>2026-08-13</a:t>
+              <a:t>2026-08-17</a:t>
             </a:fld>
             <a:endParaRPr lang="en-US" sz="900" b="0" u="none" strike="noStrike">
               <a:solidFill>
@@ -34754,7 +35054,7 @@
       </p:sp>
       <p:sp>
         <p:nvSpPr>
-          <p:cNvPr id="288" name="PlaceHolder 3"/>
+          <p:cNvPr id="287" name="PlaceHolder 4"/>
           <p:cNvSpPr>
             <a:spLocks noGrp="1"/>
           </p:cNvSpPr>
@@ -34834,7 +35134,7 @@
       </p:sp>
       <p:sp>
         <p:nvSpPr>
-          <p:cNvPr id="289" name="PlaceHolder 4"/>
+          <p:cNvPr id="288" name="PlaceHolder 5"/>
           <p:cNvSpPr>
             <a:spLocks noGrp="1"/>
           </p:cNvSpPr>
@@ -34889,7 +35189,7 @@
                 <a:tab pos="0" algn="l"/>
               </a:tabLst>
             </a:pPr>
-            <a:fld id="{6F460496-9776-4E80-87D9-0ED3CB581A89}" type="slidenum">
+            <a:fld id="{8C518481-7C3E-4A1B-8725-0C4FDF39E56B}" type="slidenum">
               <a:rPr lang="de-DE" sz="1550" b="1" u="none" strike="noStrike">
                 <a:solidFill>
                   <a:srgbClr val="6D7373"/>
@@ -34899,7 +35199,7 @@
                 <a:latin typeface="SRH Text"/>
                 <a:ea typeface="SRH"/>
               </a:rPr>
-              <a:t>22</a:t>
+              <a:t>&lt;number&gt;</a:t>
             </a:fld>
             <a:endParaRPr lang="en-US" sz="1550" b="0" u="none" strike="noStrike">
               <a:solidFill>
@@ -34912,30 +35212,6 @@
           </a:p>
         </p:txBody>
       </p:sp>
-      <p:pic>
-        <p:nvPicPr>
-          <p:cNvPr id="290" name=""/>
-          <p:cNvPicPr/>
-          <p:nvPr/>
-        </p:nvPicPr>
-        <p:blipFill>
-          <a:blip r:embed="rId2"/>
-          <a:stretch/>
-        </p:blipFill>
-        <p:spPr>
-          <a:xfrm>
-            <a:off x="3200400" y="829800"/>
-            <a:ext cx="5486400" cy="2426040"/>
-          </a:xfrm>
-          <a:prstGeom prst="rect">
-            <a:avLst/>
-          </a:prstGeom>
-          <a:noFill/>
-          <a:ln w="0">
-            <a:noFill/>
-          </a:ln>
-        </p:spPr>
-      </p:pic>
     </p:spTree>
   </p:cSld>
   <mc:AlternateContent>
@@ -34968,7 +35244,7 @@
       </p:grpSpPr>
       <p:sp>
         <p:nvSpPr>
-          <p:cNvPr id="291" name="PlaceHolder 1"/>
+          <p:cNvPr id="289" name="PlaceHolder 1"/>
           <p:cNvSpPr>
             <a:spLocks noGrp="1"/>
           </p:cNvSpPr>
@@ -35009,9 +35285,6 @@
                 <a:tab pos="0" algn="l"/>
               </a:tabLst>
             </a:pPr>
-            <a:br>
-              <a:rPr sz="1800"/>
-            </a:br>
             <a:r>
               <a:rPr lang="de-DE" sz="1800" b="1" u="none" strike="noStrike">
                 <a:solidFill>
@@ -35022,7 +35295,7 @@
                 <a:latin typeface="SRH Headline"/>
                 <a:ea typeface="SRH Headline"/>
               </a:rPr>
-              <a:t>Machine Learning Model Development &amp; Cost-Sensitive Optimization</a:t>
+              <a:t>Cost-Sensitive Learning </a:t>
             </a:r>
             <a:br>
               <a:rPr sz="1800"/>
@@ -35040,7 +35313,7 @@
       </p:sp>
       <p:sp>
         <p:nvSpPr>
-          <p:cNvPr id="292" name="PlaceHolder 2"/>
+          <p:cNvPr id="290" name="PlaceHolder 2"/>
           <p:cNvSpPr>
             <a:spLocks noGrp="1"/>
           </p:cNvSpPr>
@@ -35051,7 +35324,7 @@
         <p:spPr>
           <a:xfrm>
             <a:off x="228600" y="914400"/>
-            <a:ext cx="11201040" cy="6857640"/>
+            <a:ext cx="11201040" cy="5943600"/>
           </a:xfrm>
           <a:prstGeom prst="rect">
             <a:avLst/>
@@ -35091,7 +35364,19 @@
                 <a:latin typeface="SRH Text"/>
                 <a:ea typeface="SRH Text"/>
               </a:rPr>
-              <a:t>Algorithm: XGBoost (Extreme Gradient Boosting) </a:t>
+              <a:t>Rather than modifying the data, cost-sensitive methods embed penalty structures </a:t>
+            </a:r>
+            <a:r>
+              <a:rPr lang="en-US" sz="1400" b="0" u="none" strike="noStrike">
+                <a:solidFill>
+                  <a:srgbClr val="1C1C1C"/>
+                </a:solidFill>
+                <a:effectLst/>
+                <a:uFillTx/>
+                <a:latin typeface="SRH Text"/>
+                <a:ea typeface="SRH Text"/>
+              </a:rPr>
+              <a:t>directly into the learning process:</a:t>
             </a:r>
             <a:endParaRPr lang="de-DE" sz="1400" b="0" u="none" strike="noStrike">
               <a:solidFill>
@@ -35103,7 +35388,7 @@
             </a:endParaRPr>
           </a:p>
           <a:p>
-            <a:pPr marL="285840" indent="-285840" algn="l" defTabSz="914400">
+            <a:pPr marL="285840" indent="0" algn="l" defTabSz="914400">
               <a:lnSpc>
                 <a:spcPct val="150000"/>
               </a:lnSpc>
@@ -35113,11 +35398,7 @@
               <a:spcAft>
                 <a:spcPts val="992"/>
               </a:spcAft>
-              <a:buClr>
-                <a:srgbClr val="575756"/>
-              </a:buClr>
-              <a:buFont typeface="Wingdings" charset="2"/>
-              <a:buChar char=""/>
+              <a:buNone/>
               <a:tabLst>
                 <a:tab pos="0" algn="l"/>
               </a:tabLst>
@@ -35132,10 +35413,10 @@
                 <a:latin typeface="SRH Text"/>
                 <a:ea typeface="SRH Text"/>
               </a:rPr>
-              <a:t>Data Split: </a:t>
-            </a:r>
-            <a:r>
-              <a:rPr lang="en-US" sz="1400" b="1" u="none" strike="noStrike">
+              <a:t>o Misclassifying a minority class (e.g., wrongly denying a qualified applicant) </a:t>
+            </a:r>
+            <a:r>
+              <a:rPr lang="en-US" sz="1400" b="0" u="none" strike="noStrike">
                 <a:solidFill>
                   <a:srgbClr val="1C1C1C"/>
                 </a:solidFill>
@@ -35144,7 +35425,7 @@
                 <a:latin typeface="SRH Text"/>
                 <a:ea typeface="SRH Text"/>
               </a:rPr>
-              <a:t>80% Training | 10% Validation | 10% Test </a:t>
+              <a:t>incurs a higher cost.</a:t>
             </a:r>
             <a:endParaRPr lang="de-DE" sz="1400" b="0" u="none" strike="noStrike">
               <a:solidFill>
@@ -35156,7 +35437,7 @@
             </a:endParaRPr>
           </a:p>
           <a:p>
-            <a:pPr marL="285840" indent="-285840" algn="l" defTabSz="914400">
+            <a:pPr marL="285840" indent="0" algn="l" defTabSz="914400">
               <a:lnSpc>
                 <a:spcPct val="150000"/>
               </a:lnSpc>
@@ -35166,11 +35447,7 @@
               <a:spcAft>
                 <a:spcPts val="992"/>
               </a:spcAft>
-              <a:buClr>
-                <a:srgbClr val="575756"/>
-              </a:buClr>
-              <a:buFont typeface="Wingdings" charset="2"/>
-              <a:buChar char=""/>
+              <a:buNone/>
               <a:tabLst>
                 <a:tab pos="0" algn="l"/>
               </a:tabLst>
@@ -35185,7 +35462,19 @@
                 <a:latin typeface="SRH Text"/>
                 <a:ea typeface="SRH Text"/>
               </a:rPr>
-              <a:t>Class Imbalance: Class weights applied during training </a:t>
+              <a:t>o Class weights are adjusted inversely proportional to class frequency or based on </a:t>
+            </a:r>
+            <a:r>
+              <a:rPr lang="en-US" sz="1400" b="0" u="none" strike="noStrike">
+                <a:solidFill>
+                  <a:srgbClr val="1C1C1C"/>
+                </a:solidFill>
+                <a:effectLst/>
+                <a:uFillTx/>
+                <a:latin typeface="SRH Text"/>
+                <a:ea typeface="SRH Text"/>
+              </a:rPr>
+              <a:t>real-world cost estimations.</a:t>
             </a:r>
             <a:endParaRPr lang="de-DE" sz="1400" b="0" u="none" strike="noStrike">
               <a:solidFill>
@@ -35197,7 +35486,7 @@
             </a:endParaRPr>
           </a:p>
           <a:p>
-            <a:pPr marL="285840" indent="-285840" algn="l" defTabSz="914400">
+            <a:pPr marL="285840" indent="0" algn="l" defTabSz="914400">
               <a:lnSpc>
                 <a:spcPct val="150000"/>
               </a:lnSpc>
@@ -35207,11 +35496,7 @@
               <a:spcAft>
                 <a:spcPts val="992"/>
               </a:spcAft>
-              <a:buClr>
-                <a:srgbClr val="575756"/>
-              </a:buClr>
-              <a:buFont typeface="Wingdings" charset="2"/>
-              <a:buChar char=""/>
+              <a:buNone/>
               <a:tabLst>
                 <a:tab pos="0" algn="l"/>
               </a:tabLst>
@@ -35226,7 +35511,7 @@
                 <a:latin typeface="SRH Text"/>
                 <a:ea typeface="SRH Text"/>
               </a:rPr>
-              <a:t>Hyperparameter Optimization: Grid Search </a:t>
+              <a:t>• Implemented through:</a:t>
             </a:r>
             <a:endParaRPr lang="de-DE" sz="1400" b="0" u="none" strike="noStrike">
               <a:solidFill>
@@ -35238,7 +35523,7 @@
             </a:endParaRPr>
           </a:p>
           <a:p>
-            <a:pPr marL="285840" indent="-285840" algn="l" defTabSz="914400">
+            <a:pPr marL="285840" indent="0" algn="l" defTabSz="914400">
               <a:lnSpc>
                 <a:spcPct val="150000"/>
               </a:lnSpc>
@@ -35248,11 +35533,7 @@
               <a:spcAft>
                 <a:spcPts val="992"/>
               </a:spcAft>
-              <a:buClr>
-                <a:srgbClr val="575756"/>
-              </a:buClr>
-              <a:buFont typeface="Wingdings" charset="2"/>
-              <a:buChar char=""/>
+              <a:buNone/>
               <a:tabLst>
                 <a:tab pos="0" algn="l"/>
               </a:tabLst>
@@ -35267,7 +35548,7 @@
                 <a:latin typeface="SRH Text"/>
                 <a:ea typeface="SRH Text"/>
               </a:rPr>
-              <a:t>n_estimators: [200, 300, 400, 500,600,700] </a:t>
+              <a:t>o class_weight parameter </a:t>
             </a:r>
             <a:endParaRPr lang="de-DE" sz="1400" b="0" u="none" strike="noStrike">
               <a:solidFill>
@@ -35279,7 +35560,7 @@
             </a:endParaRPr>
           </a:p>
           <a:p>
-            <a:pPr marL="285840" indent="-285840" algn="l" defTabSz="914400">
+            <a:pPr marL="285840" indent="0" algn="l" defTabSz="914400">
               <a:lnSpc>
                 <a:spcPct val="150000"/>
               </a:lnSpc>
@@ -35289,11 +35570,7 @@
               <a:spcAft>
                 <a:spcPts val="992"/>
               </a:spcAft>
-              <a:buClr>
-                <a:srgbClr val="575756"/>
-              </a:buClr>
-              <a:buFont typeface="Wingdings" charset="2"/>
-              <a:buChar char=""/>
+              <a:buNone/>
               <a:tabLst>
                 <a:tab pos="0" algn="l"/>
               </a:tabLst>
@@ -35308,7 +35585,7 @@
                 <a:latin typeface="SRH Text"/>
                 <a:ea typeface="SRH Text"/>
               </a:rPr>
-              <a:t>learning_rate: [0.03, 0.05, 0.07, 0.1 ,0.2, 0.3] </a:t>
+              <a:t>o Custom loss functions (e.g., weighted loss in XGBoost).</a:t>
             </a:r>
             <a:endParaRPr lang="de-DE" sz="1400" b="0" u="none" strike="noStrike">
               <a:solidFill>
@@ -35320,7 +35597,7 @@
             </a:endParaRPr>
           </a:p>
           <a:p>
-            <a:pPr marL="285840" indent="-285840" algn="l" defTabSz="914400">
+            <a:pPr marL="285840" indent="0" algn="l" defTabSz="914400">
               <a:lnSpc>
                 <a:spcPct val="150000"/>
               </a:lnSpc>
@@ -35330,11 +35607,7 @@
               <a:spcAft>
                 <a:spcPts val="992"/>
               </a:spcAft>
-              <a:buClr>
-                <a:srgbClr val="575756"/>
-              </a:buClr>
-              <a:buFont typeface="Wingdings" charset="2"/>
-              <a:buChar char=""/>
+              <a:buNone/>
               <a:tabLst>
                 <a:tab pos="0" algn="l"/>
               </a:tabLst>
@@ -35349,7 +35622,7 @@
                 <a:latin typeface="SRH Text"/>
                 <a:ea typeface="SRH Text"/>
               </a:rPr>
-              <a:t>max_depth: [3, 4, 5, 6,7,8] </a:t>
+              <a:t>Cost-Effectiveness Analysis:</a:t>
             </a:r>
             <a:endParaRPr lang="de-DE" sz="1400" b="0" u="none" strike="noStrike">
               <a:solidFill>
@@ -35361,7 +35634,7 @@
             </a:endParaRPr>
           </a:p>
           <a:p>
-            <a:pPr marL="285840" indent="-285840" algn="l" defTabSz="914400">
+            <a:pPr marL="285840" indent="0" algn="l" defTabSz="914400">
               <a:lnSpc>
                 <a:spcPct val="150000"/>
               </a:lnSpc>
@@ -35371,11 +35644,7 @@
               <a:spcAft>
                 <a:spcPts val="992"/>
               </a:spcAft>
-              <a:buClr>
-                <a:srgbClr val="575756"/>
-              </a:buClr>
-              <a:buFont typeface="Wingdings" charset="2"/>
-              <a:buChar char=""/>
+              <a:buNone/>
               <a:tabLst>
                 <a:tab pos="0" algn="l"/>
               </a:tabLst>
@@ -35390,7 +35659,7 @@
                 <a:latin typeface="SRH Text"/>
                 <a:ea typeface="SRH Text"/>
               </a:rPr>
-              <a:t>min_child_weight: [1, 3, 5, 7, 9] </a:t>
+              <a:t>To evaluate financial utility:</a:t>
             </a:r>
             <a:endParaRPr lang="de-DE" sz="1400" b="0" u="none" strike="noStrike">
               <a:solidFill>
@@ -35427,8 +35696,144 @@
                 <a:latin typeface="SRH Text"/>
                 <a:ea typeface="SRH Text"/>
               </a:rPr>
-              <a:t>Total: 256 XGBoost configurations evaluated </a:t>
-            </a:r>
+              <a:t>o False Positives (FP): Approving a loan to a high-risk borrower (costly default </a:t>
+            </a:r>
+            <a:r>
+              <a:rPr lang="en-US" sz="1400" b="0" u="none" strike="noStrike">
+                <a:solidFill>
+                  <a:srgbClr val="1C1C1C"/>
+                </a:solidFill>
+                <a:effectLst/>
+                <a:uFillTx/>
+                <a:latin typeface="SRH Text"/>
+                <a:ea typeface="SRH Text"/>
+              </a:rPr>
+              <a:t>risk).</a:t>
+            </a:r>
+            <a:endParaRPr lang="de-DE" sz="1400" b="0" u="none" strike="noStrike">
+              <a:solidFill>
+                <a:schemeClr val="dk1"/>
+              </a:solidFill>
+              <a:effectLst/>
+              <a:uFillTx/>
+              <a:latin typeface="SRH Text"/>
+            </a:endParaRPr>
+          </a:p>
+          <a:p>
+            <a:pPr marL="285840" indent="0" algn="l" defTabSz="914400">
+              <a:lnSpc>
+                <a:spcPct val="150000"/>
+              </a:lnSpc>
+              <a:spcBef>
+                <a:spcPts val="1191"/>
+              </a:spcBef>
+              <a:spcAft>
+                <a:spcPts val="992"/>
+              </a:spcAft>
+              <a:buNone/>
+              <a:tabLst>
+                <a:tab pos="0" algn="l"/>
+              </a:tabLst>
+            </a:pPr>
+            <a:r>
+              <a:rPr lang="en-US" sz="1400" b="0" u="none" strike="noStrike">
+                <a:solidFill>
+                  <a:srgbClr val="1C1C1C"/>
+                </a:solidFill>
+                <a:effectLst/>
+                <a:uFillTx/>
+                <a:latin typeface="SRH Text"/>
+                <a:ea typeface="SRH Text"/>
+              </a:rPr>
+              <a:t>o False Negatives (FN): Denying a reliable borrower (opportunity loss, customer </a:t>
+            </a:r>
+            <a:r>
+              <a:rPr lang="en-US" sz="1400" b="0" u="none" strike="noStrike">
+                <a:solidFill>
+                  <a:srgbClr val="1C1C1C"/>
+                </a:solidFill>
+                <a:effectLst/>
+                <a:uFillTx/>
+                <a:latin typeface="SRH Text"/>
+                <a:ea typeface="SRH Text"/>
+              </a:rPr>
+              <a:t>attrition). </a:t>
+            </a:r>
+            <a:endParaRPr lang="de-DE" sz="1400" b="0" u="none" strike="noStrike">
+              <a:solidFill>
+                <a:schemeClr val="dk1"/>
+              </a:solidFill>
+              <a:effectLst/>
+              <a:uFillTx/>
+              <a:latin typeface="SRH Text"/>
+            </a:endParaRPr>
+          </a:p>
+          <a:p>
+            <a:pPr marL="285840" indent="0" algn="l" defTabSz="914400">
+              <a:lnSpc>
+                <a:spcPct val="150000"/>
+              </a:lnSpc>
+              <a:spcBef>
+                <a:spcPts val="1191"/>
+              </a:spcBef>
+              <a:spcAft>
+                <a:spcPts val="992"/>
+              </a:spcAft>
+              <a:buNone/>
+              <a:tabLst>
+                <a:tab pos="0" algn="l"/>
+              </a:tabLst>
+            </a:pPr>
+            <a:endParaRPr lang="de-DE" sz="1400" b="0" u="none" strike="noStrike">
+              <a:solidFill>
+                <a:schemeClr val="dk1"/>
+              </a:solidFill>
+              <a:effectLst/>
+              <a:uFillTx/>
+              <a:latin typeface="SRH Text"/>
+            </a:endParaRPr>
+          </a:p>
+          <a:p>
+            <a:pPr marL="285840" indent="0" algn="l" defTabSz="914400">
+              <a:lnSpc>
+                <a:spcPct val="150000"/>
+              </a:lnSpc>
+              <a:spcBef>
+                <a:spcPts val="1191"/>
+              </a:spcBef>
+              <a:spcAft>
+                <a:spcPts val="992"/>
+              </a:spcAft>
+              <a:buNone/>
+              <a:tabLst>
+                <a:tab pos="0" algn="l"/>
+              </a:tabLst>
+            </a:pPr>
+            <a:endParaRPr lang="de-DE" sz="1400" b="0" u="none" strike="noStrike">
+              <a:solidFill>
+                <a:schemeClr val="dk1"/>
+              </a:solidFill>
+              <a:effectLst/>
+              <a:uFillTx/>
+              <a:latin typeface="SRH Text"/>
+            </a:endParaRPr>
+          </a:p>
+          <a:p>
+            <a:pPr marL="285840" indent="0" algn="l" defTabSz="914400">
+              <a:lnSpc>
+                <a:spcPct val="150000"/>
+              </a:lnSpc>
+              <a:spcBef>
+                <a:spcPts val="1191"/>
+              </a:spcBef>
+              <a:spcAft>
+                <a:spcPts val="992"/>
+              </a:spcAft>
+              <a:buNone/>
+              <a:tabLst>
+                <a:tab pos="0" algn="l"/>
+              </a:tabLst>
+            </a:pPr>
             <a:endParaRPr lang="de-DE" sz="1400" b="0" u="none" strike="noStrike">
               <a:solidFill>
                 <a:schemeClr val="dk1"/>
@@ -35442,7 +35847,7 @@
       </p:sp>
       <p:sp>
         <p:nvSpPr>
-          <p:cNvPr id="293" name="PlaceHolder 3"/>
+          <p:cNvPr id="291" name="PlaceHolder 3"/>
           <p:cNvSpPr>
             <a:spLocks noGrp="1"/>
           </p:cNvSpPr>
@@ -35497,7 +35902,7 @@
                 <a:tab pos="0" algn="l"/>
               </a:tabLst>
             </a:pPr>
-            <a:fld id="{79491176-8279-4427-A222-DBC61C50D897}" type="datetime1">
+            <a:fld id="{C85A80EF-341C-4EE2-8443-9EEEBF496863}" type="datetime1">
               <a:rPr lang="en-CA" sz="900" b="1" u="none" strike="noStrike">
                 <a:solidFill>
                   <a:srgbClr val="6D7373"/>
@@ -35507,7 +35912,7 @@
                 <a:latin typeface="SRH Text"/>
                 <a:ea typeface="SRH"/>
               </a:rPr>
-              <a:t>2026-08-13</a:t>
+              <a:t>2026-08-17</a:t>
             </a:fld>
             <a:endParaRPr lang="en-US" sz="900" b="0" u="none" strike="noStrike">
               <a:solidFill>
@@ -35522,7 +35927,7 @@
       </p:sp>
       <p:sp>
         <p:nvSpPr>
-          <p:cNvPr id="294" name="PlaceHolder 4"/>
+          <p:cNvPr id="292" name="PlaceHolder 4"/>
           <p:cNvSpPr>
             <a:spLocks noGrp="1"/>
           </p:cNvSpPr>
@@ -35602,7 +36007,7 @@
       </p:sp>
       <p:sp>
         <p:nvSpPr>
-          <p:cNvPr id="295" name="PlaceHolder 5"/>
+          <p:cNvPr id="293" name="PlaceHolder 5"/>
           <p:cNvSpPr>
             <a:spLocks noGrp="1"/>
           </p:cNvSpPr>
@@ -35657,7 +36062,7 @@
                 <a:tab pos="0" algn="l"/>
               </a:tabLst>
             </a:pPr>
-            <a:fld id="{7C1CA6D7-6B72-4C52-84AC-7EBA166A2310}" type="slidenum">
+            <a:fld id="{FF75C3BF-49EC-4B4E-A880-F46905836769}" type="slidenum">
               <a:rPr lang="de-DE" sz="1550" b="1" u="none" strike="noStrike">
                 <a:solidFill>
                   <a:srgbClr val="6D7373"/>
@@ -35667,7 +36072,7 @@
                 <a:latin typeface="SRH Text"/>
                 <a:ea typeface="SRH"/>
               </a:rPr>
-              <a:t>22</a:t>
+              <a:t>&lt;number&gt;</a:t>
             </a:fld>
             <a:endParaRPr lang="en-US" sz="1550" b="0" u="none" strike="noStrike">
               <a:solidFill>
@@ -35712,7 +36117,7 @@
       </p:grpSpPr>
       <p:sp>
         <p:nvSpPr>
-          <p:cNvPr id="296" name="PlaceHolder 1"/>
+          <p:cNvPr id="294" name="PlaceHolder 1"/>
           <p:cNvSpPr>
             <a:spLocks noGrp="1"/>
           </p:cNvSpPr>
@@ -35722,8 +36127,8 @@
         </p:nvSpPr>
         <p:spPr>
           <a:xfrm>
-            <a:off x="191880" y="228600"/>
-            <a:ext cx="9155880" cy="685800"/>
+            <a:off x="191880" y="538560"/>
+            <a:ext cx="9155880" cy="604440"/>
           </a:xfrm>
           <a:prstGeom prst="rect">
             <a:avLst/>
@@ -35753,8 +36158,11 @@
                 <a:tab pos="0" algn="l"/>
               </a:tabLst>
             </a:pPr>
-            <a:r>
-              <a:rPr lang="de-DE" sz="1800" b="1" u="none" strike="noStrike">
+            <a:br>
+              <a:rPr sz="2600"/>
+            </a:br>
+            <a:r>
+              <a:rPr lang="en-US" sz="2600" b="1" u="none" strike="noStrike">
                 <a:solidFill>
                   <a:srgbClr val="FF4000"/>
                 </a:solidFill>
@@ -35763,14 +36171,26 @@
                 <a:latin typeface="SRH Headline"/>
                 <a:ea typeface="SRH Headline"/>
               </a:rPr>
-              <a:t>Cost-Sensitive Learning </a:t>
+              <a:t> </a:t>
             </a:r>
             <a:br>
-              <a:rPr sz="1800"/>
+              <a:rPr sz="2600"/>
             </a:br>
-            <a:endParaRPr lang="de-DE" sz="1800" b="1" u="none" strike="noStrike">
-              <a:solidFill>
-                <a:schemeClr val="dk1"/>
+            <a:r>
+              <a:rPr lang="en-US" sz="2600" b="1" u="none" strike="noStrike">
+                <a:solidFill>
+                  <a:srgbClr val="FF4000"/>
+                </a:solidFill>
+                <a:effectLst/>
+                <a:uFillTx/>
+                <a:latin typeface="SRH Headline"/>
+                <a:ea typeface="SRH Headline"/>
+              </a:rPr>
+              <a:t>   Class Imbalance</a:t>
+            </a:r>
+            <a:endParaRPr lang="de-DE" sz="2600" b="1" u="none" strike="noStrike">
+              <a:solidFill>
+                <a:srgbClr val="FF4000"/>
               </a:solidFill>
               <a:effectLst/>
               <a:uFillTx/>
@@ -35781,7 +36201,7 @@
       </p:sp>
       <p:sp>
         <p:nvSpPr>
-          <p:cNvPr id="297" name="PlaceHolder 2"/>
+          <p:cNvPr id="295" name="PlaceHolder 2"/>
           <p:cNvSpPr>
             <a:spLocks noGrp="1"/>
           </p:cNvSpPr>
@@ -35791,8 +36211,8 @@
         </p:nvSpPr>
         <p:spPr>
           <a:xfrm>
-            <a:off x="228600" y="914400"/>
-            <a:ext cx="11201040" cy="5943600"/>
+            <a:off x="228600" y="1333800"/>
+            <a:ext cx="10803600" cy="5066640"/>
           </a:xfrm>
           <a:prstGeom prst="rect">
             <a:avLst/>
@@ -35823,7 +36243,7 @@
               </a:tabLst>
             </a:pPr>
             <a:r>
-              <a:rPr lang="en-US" sz="1400" b="0" u="none" strike="noStrike">
+              <a:rPr lang="en-US" sz="1300" b="0" u="none" strike="noStrike">
                 <a:solidFill>
                   <a:srgbClr val="1C1C1C"/>
                 </a:solidFill>
@@ -35832,477 +36252,9 @@
                 <a:latin typeface="SRH Text"/>
                 <a:ea typeface="SRH Text"/>
               </a:rPr>
-              <a:t>Rather than modifying the data, cost-sensitive methods embed penalty structures </a:t>
-            </a:r>
-            <a:r>
-              <a:rPr lang="en-US" sz="1400" b="0" u="none" strike="noStrike">
-                <a:solidFill>
-                  <a:srgbClr val="1C1C1C"/>
-                </a:solidFill>
-                <a:effectLst/>
-                <a:uFillTx/>
-                <a:latin typeface="SRH Text"/>
-                <a:ea typeface="SRH Text"/>
-              </a:rPr>
-              <a:t>directly into the learning process:</a:t>
-            </a:r>
-            <a:endParaRPr lang="de-DE" sz="1400" b="0" u="none" strike="noStrike">
-              <a:solidFill>
-                <a:schemeClr val="dk1"/>
-              </a:solidFill>
-              <a:effectLst/>
-              <a:uFillTx/>
-              <a:latin typeface="SRH Text"/>
-            </a:endParaRPr>
-          </a:p>
-          <a:p>
-            <a:pPr marL="285840" indent="0" algn="l" defTabSz="914400">
-              <a:lnSpc>
-                <a:spcPct val="150000"/>
-              </a:lnSpc>
-              <a:spcBef>
-                <a:spcPts val="1191"/>
-              </a:spcBef>
-              <a:spcAft>
-                <a:spcPts val="992"/>
-              </a:spcAft>
-              <a:buNone/>
-              <a:tabLst>
-                <a:tab pos="0" algn="l"/>
-              </a:tabLst>
-            </a:pPr>
-            <a:r>
-              <a:rPr lang="en-US" sz="1400" b="0" u="none" strike="noStrike">
-                <a:solidFill>
-                  <a:srgbClr val="1C1C1C"/>
-                </a:solidFill>
-                <a:effectLst/>
-                <a:uFillTx/>
-                <a:latin typeface="SRH Text"/>
-                <a:ea typeface="SRH Text"/>
-              </a:rPr>
-              <a:t>o Misclassifying a minority class (e.g., wrongly denying a qualified applicant) </a:t>
-            </a:r>
-            <a:r>
-              <a:rPr lang="en-US" sz="1400" b="0" u="none" strike="noStrike">
-                <a:solidFill>
-                  <a:srgbClr val="1C1C1C"/>
-                </a:solidFill>
-                <a:effectLst/>
-                <a:uFillTx/>
-                <a:latin typeface="SRH Text"/>
-                <a:ea typeface="SRH Text"/>
-              </a:rPr>
-              <a:t>incurs a higher cost.</a:t>
-            </a:r>
-            <a:endParaRPr lang="de-DE" sz="1400" b="0" u="none" strike="noStrike">
-              <a:solidFill>
-                <a:schemeClr val="dk1"/>
-              </a:solidFill>
-              <a:effectLst/>
-              <a:uFillTx/>
-              <a:latin typeface="SRH Text"/>
-            </a:endParaRPr>
-          </a:p>
-          <a:p>
-            <a:pPr marL="285840" indent="0" algn="l" defTabSz="914400">
-              <a:lnSpc>
-                <a:spcPct val="150000"/>
-              </a:lnSpc>
-              <a:spcBef>
-                <a:spcPts val="1191"/>
-              </a:spcBef>
-              <a:spcAft>
-                <a:spcPts val="992"/>
-              </a:spcAft>
-              <a:buNone/>
-              <a:tabLst>
-                <a:tab pos="0" algn="l"/>
-              </a:tabLst>
-            </a:pPr>
-            <a:r>
-              <a:rPr lang="en-US" sz="1400" b="0" u="none" strike="noStrike">
-                <a:solidFill>
-                  <a:srgbClr val="1C1C1C"/>
-                </a:solidFill>
-                <a:effectLst/>
-                <a:uFillTx/>
-                <a:latin typeface="SRH Text"/>
-                <a:ea typeface="SRH Text"/>
-              </a:rPr>
-              <a:t>o Class weights are adjusted inversely proportional to class frequency or based on </a:t>
-            </a:r>
-            <a:r>
-              <a:rPr lang="en-US" sz="1400" b="0" u="none" strike="noStrike">
-                <a:solidFill>
-                  <a:srgbClr val="1C1C1C"/>
-                </a:solidFill>
-                <a:effectLst/>
-                <a:uFillTx/>
-                <a:latin typeface="SRH Text"/>
-                <a:ea typeface="SRH Text"/>
-              </a:rPr>
-              <a:t>real-world cost estimations.</a:t>
-            </a:r>
-            <a:endParaRPr lang="de-DE" sz="1400" b="0" u="none" strike="noStrike">
-              <a:solidFill>
-                <a:schemeClr val="dk1"/>
-              </a:solidFill>
-              <a:effectLst/>
-              <a:uFillTx/>
-              <a:latin typeface="SRH Text"/>
-            </a:endParaRPr>
-          </a:p>
-          <a:p>
-            <a:pPr marL="285840" indent="0" algn="l" defTabSz="914400">
-              <a:lnSpc>
-                <a:spcPct val="150000"/>
-              </a:lnSpc>
-              <a:spcBef>
-                <a:spcPts val="1191"/>
-              </a:spcBef>
-              <a:spcAft>
-                <a:spcPts val="992"/>
-              </a:spcAft>
-              <a:buNone/>
-              <a:tabLst>
-                <a:tab pos="0" algn="l"/>
-              </a:tabLst>
-            </a:pPr>
-            <a:r>
-              <a:rPr lang="en-US" sz="1400" b="0" u="none" strike="noStrike">
-                <a:solidFill>
-                  <a:srgbClr val="1C1C1C"/>
-                </a:solidFill>
-                <a:effectLst/>
-                <a:uFillTx/>
-                <a:latin typeface="SRH Text"/>
-                <a:ea typeface="SRH Text"/>
-              </a:rPr>
-              <a:t>• Implemented through:</a:t>
-            </a:r>
-            <a:endParaRPr lang="de-DE" sz="1400" b="0" u="none" strike="noStrike">
-              <a:solidFill>
-                <a:schemeClr val="dk1"/>
-              </a:solidFill>
-              <a:effectLst/>
-              <a:uFillTx/>
-              <a:latin typeface="SRH Text"/>
-            </a:endParaRPr>
-          </a:p>
-          <a:p>
-            <a:pPr marL="285840" indent="0" algn="l" defTabSz="914400">
-              <a:lnSpc>
-                <a:spcPct val="150000"/>
-              </a:lnSpc>
-              <a:spcBef>
-                <a:spcPts val="1191"/>
-              </a:spcBef>
-              <a:spcAft>
-                <a:spcPts val="992"/>
-              </a:spcAft>
-              <a:buNone/>
-              <a:tabLst>
-                <a:tab pos="0" algn="l"/>
-              </a:tabLst>
-            </a:pPr>
-            <a:r>
-              <a:rPr lang="en-US" sz="1400" b="0" u="none" strike="noStrike">
-                <a:solidFill>
-                  <a:srgbClr val="1C1C1C"/>
-                </a:solidFill>
-                <a:effectLst/>
-                <a:uFillTx/>
-                <a:latin typeface="SRH Text"/>
-                <a:ea typeface="SRH Text"/>
-              </a:rPr>
-              <a:t>o class_weight parameter </a:t>
-            </a:r>
-            <a:endParaRPr lang="de-DE" sz="1400" b="0" u="none" strike="noStrike">
-              <a:solidFill>
-                <a:schemeClr val="dk1"/>
-              </a:solidFill>
-              <a:effectLst/>
-              <a:uFillTx/>
-              <a:latin typeface="SRH Text"/>
-            </a:endParaRPr>
-          </a:p>
-          <a:p>
-            <a:pPr marL="285840" indent="0" algn="l" defTabSz="914400">
-              <a:lnSpc>
-                <a:spcPct val="150000"/>
-              </a:lnSpc>
-              <a:spcBef>
-                <a:spcPts val="1191"/>
-              </a:spcBef>
-              <a:spcAft>
-                <a:spcPts val="992"/>
-              </a:spcAft>
-              <a:buNone/>
-              <a:tabLst>
-                <a:tab pos="0" algn="l"/>
-              </a:tabLst>
-            </a:pPr>
-            <a:r>
-              <a:rPr lang="en-US" sz="1400" b="0" u="none" strike="noStrike">
-                <a:solidFill>
-                  <a:srgbClr val="1C1C1C"/>
-                </a:solidFill>
-                <a:effectLst/>
-                <a:uFillTx/>
-                <a:latin typeface="SRH Text"/>
-                <a:ea typeface="SRH Text"/>
-              </a:rPr>
-              <a:t>o Custom loss functions (e.g., weighted loss in XGBoost).</a:t>
-            </a:r>
-            <a:endParaRPr lang="de-DE" sz="1400" b="0" u="none" strike="noStrike">
-              <a:solidFill>
-                <a:schemeClr val="dk1"/>
-              </a:solidFill>
-              <a:effectLst/>
-              <a:uFillTx/>
-              <a:latin typeface="SRH Text"/>
-            </a:endParaRPr>
-          </a:p>
-          <a:p>
-            <a:pPr marL="285840" indent="0" algn="l" defTabSz="914400">
-              <a:lnSpc>
-                <a:spcPct val="150000"/>
-              </a:lnSpc>
-              <a:spcBef>
-                <a:spcPts val="1191"/>
-              </a:spcBef>
-              <a:spcAft>
-                <a:spcPts val="992"/>
-              </a:spcAft>
-              <a:buNone/>
-              <a:tabLst>
-                <a:tab pos="0" algn="l"/>
-              </a:tabLst>
-            </a:pPr>
-            <a:r>
-              <a:rPr lang="en-US" sz="1400" b="0" u="none" strike="noStrike">
-                <a:solidFill>
-                  <a:srgbClr val="1C1C1C"/>
-                </a:solidFill>
-                <a:effectLst/>
-                <a:uFillTx/>
-                <a:latin typeface="SRH Text"/>
-                <a:ea typeface="SRH Text"/>
-              </a:rPr>
-              <a:t>Cost-Effectiveness Analysis:</a:t>
-            </a:r>
-            <a:endParaRPr lang="de-DE" sz="1400" b="0" u="none" strike="noStrike">
-              <a:solidFill>
-                <a:schemeClr val="dk1"/>
-              </a:solidFill>
-              <a:effectLst/>
-              <a:uFillTx/>
-              <a:latin typeface="SRH Text"/>
-            </a:endParaRPr>
-          </a:p>
-          <a:p>
-            <a:pPr marL="285840" indent="0" algn="l" defTabSz="914400">
-              <a:lnSpc>
-                <a:spcPct val="150000"/>
-              </a:lnSpc>
-              <a:spcBef>
-                <a:spcPts val="1191"/>
-              </a:spcBef>
-              <a:spcAft>
-                <a:spcPts val="992"/>
-              </a:spcAft>
-              <a:buNone/>
-              <a:tabLst>
-                <a:tab pos="0" algn="l"/>
-              </a:tabLst>
-            </a:pPr>
-            <a:r>
-              <a:rPr lang="en-US" sz="1400" b="0" u="none" strike="noStrike">
-                <a:solidFill>
-                  <a:srgbClr val="1C1C1C"/>
-                </a:solidFill>
-                <a:effectLst/>
-                <a:uFillTx/>
-                <a:latin typeface="SRH Text"/>
-                <a:ea typeface="SRH Text"/>
-              </a:rPr>
-              <a:t>To evaluate financial utility:</a:t>
-            </a:r>
-            <a:endParaRPr lang="de-DE" sz="1400" b="0" u="none" strike="noStrike">
-              <a:solidFill>
-                <a:schemeClr val="dk1"/>
-              </a:solidFill>
-              <a:effectLst/>
-              <a:uFillTx/>
-              <a:latin typeface="SRH Text"/>
-            </a:endParaRPr>
-          </a:p>
-          <a:p>
-            <a:pPr marL="285840" indent="0" algn="l" defTabSz="914400">
-              <a:lnSpc>
-                <a:spcPct val="150000"/>
-              </a:lnSpc>
-              <a:spcBef>
-                <a:spcPts val="1191"/>
-              </a:spcBef>
-              <a:spcAft>
-                <a:spcPts val="992"/>
-              </a:spcAft>
-              <a:buNone/>
-              <a:tabLst>
-                <a:tab pos="0" algn="l"/>
-              </a:tabLst>
-            </a:pPr>
-            <a:r>
-              <a:rPr lang="en-US" sz="1400" b="0" u="none" strike="noStrike">
-                <a:solidFill>
-                  <a:srgbClr val="1C1C1C"/>
-                </a:solidFill>
-                <a:effectLst/>
-                <a:uFillTx/>
-                <a:latin typeface="SRH Text"/>
-                <a:ea typeface="SRH Text"/>
-              </a:rPr>
-              <a:t>o False Positives (FP): Approving a loan to a high-risk borrower (costly default </a:t>
-            </a:r>
-            <a:r>
-              <a:rPr lang="en-US" sz="1400" b="0" u="none" strike="noStrike">
-                <a:solidFill>
-                  <a:srgbClr val="1C1C1C"/>
-                </a:solidFill>
-                <a:effectLst/>
-                <a:uFillTx/>
-                <a:latin typeface="SRH Text"/>
-                <a:ea typeface="SRH Text"/>
-              </a:rPr>
-              <a:t>risk).</a:t>
-            </a:r>
-            <a:endParaRPr lang="de-DE" sz="1400" b="0" u="none" strike="noStrike">
-              <a:solidFill>
-                <a:schemeClr val="dk1"/>
-              </a:solidFill>
-              <a:effectLst/>
-              <a:uFillTx/>
-              <a:latin typeface="SRH Text"/>
-            </a:endParaRPr>
-          </a:p>
-          <a:p>
-            <a:pPr marL="285840" indent="0" algn="l" defTabSz="914400">
-              <a:lnSpc>
-                <a:spcPct val="150000"/>
-              </a:lnSpc>
-              <a:spcBef>
-                <a:spcPts val="1191"/>
-              </a:spcBef>
-              <a:spcAft>
-                <a:spcPts val="992"/>
-              </a:spcAft>
-              <a:buNone/>
-              <a:tabLst>
-                <a:tab pos="0" algn="l"/>
-              </a:tabLst>
-            </a:pPr>
-            <a:r>
-              <a:rPr lang="en-US" sz="1400" b="0" u="none" strike="noStrike">
-                <a:solidFill>
-                  <a:srgbClr val="1C1C1C"/>
-                </a:solidFill>
-                <a:effectLst/>
-                <a:uFillTx/>
-                <a:latin typeface="SRH Text"/>
-                <a:ea typeface="SRH Text"/>
-              </a:rPr>
-              <a:t>o False Negatives (FN): Denying a reliable borrower (opportunity loss, customer </a:t>
-            </a:r>
-            <a:r>
-              <a:rPr lang="en-US" sz="1400" b="0" u="none" strike="noStrike">
-                <a:solidFill>
-                  <a:srgbClr val="1C1C1C"/>
-                </a:solidFill>
-                <a:effectLst/>
-                <a:uFillTx/>
-                <a:latin typeface="SRH Text"/>
-                <a:ea typeface="SRH Text"/>
-              </a:rPr>
-              <a:t>attrition). </a:t>
-            </a:r>
-            <a:endParaRPr lang="de-DE" sz="1400" b="0" u="none" strike="noStrike">
-              <a:solidFill>
-                <a:schemeClr val="dk1"/>
-              </a:solidFill>
-              <a:effectLst/>
-              <a:uFillTx/>
-              <a:latin typeface="SRH Text"/>
-            </a:endParaRPr>
-          </a:p>
-          <a:p>
-            <a:pPr marL="285840" indent="0" algn="l" defTabSz="914400">
-              <a:lnSpc>
-                <a:spcPct val="150000"/>
-              </a:lnSpc>
-              <a:spcBef>
-                <a:spcPts val="1191"/>
-              </a:spcBef>
-              <a:spcAft>
-                <a:spcPts val="992"/>
-              </a:spcAft>
-              <a:buNone/>
-              <a:tabLst>
-                <a:tab pos="0" algn="l"/>
-              </a:tabLst>
-            </a:pPr>
-            <a:endParaRPr lang="de-DE" sz="1400" b="0" u="none" strike="noStrike">
-              <a:solidFill>
-                <a:schemeClr val="dk1"/>
-              </a:solidFill>
-              <a:effectLst/>
-              <a:uFillTx/>
-              <a:latin typeface="SRH Text"/>
-            </a:endParaRPr>
-          </a:p>
-          <a:p>
-            <a:pPr marL="285840" indent="0" algn="l" defTabSz="914400">
-              <a:lnSpc>
-                <a:spcPct val="150000"/>
-              </a:lnSpc>
-              <a:spcBef>
-                <a:spcPts val="1191"/>
-              </a:spcBef>
-              <a:spcAft>
-                <a:spcPts val="992"/>
-              </a:spcAft>
-              <a:buNone/>
-              <a:tabLst>
-                <a:tab pos="0" algn="l"/>
-              </a:tabLst>
-            </a:pPr>
-            <a:endParaRPr lang="de-DE" sz="1400" b="0" u="none" strike="noStrike">
-              <a:solidFill>
-                <a:schemeClr val="dk1"/>
-              </a:solidFill>
-              <a:effectLst/>
-              <a:uFillTx/>
-              <a:latin typeface="SRH Text"/>
-            </a:endParaRPr>
-          </a:p>
-          <a:p>
-            <a:pPr marL="285840" indent="0" algn="l" defTabSz="914400">
-              <a:lnSpc>
-                <a:spcPct val="150000"/>
-              </a:lnSpc>
-              <a:spcBef>
-                <a:spcPts val="1191"/>
-              </a:spcBef>
-              <a:spcAft>
-                <a:spcPts val="992"/>
-              </a:spcAft>
-              <a:buNone/>
-              <a:tabLst>
-                <a:tab pos="0" algn="l"/>
-              </a:tabLst>
-            </a:pPr>
-            <a:endParaRPr lang="de-DE" sz="1400" b="0" u="none" strike="noStrike">
+              <a:t>The distribution of the target variable was examined to determine whether the dataset contains a significant class imbalance and whether imbalance-handling techniques are required.</a:t>
+            </a:r>
+            <a:endParaRPr lang="de-DE" sz="1300" b="0" u="none" strike="noStrike">
               <a:solidFill>
                 <a:schemeClr val="dk1"/>
               </a:solidFill>
@@ -36315,7 +36267,7 @@
       </p:sp>
       <p:sp>
         <p:nvSpPr>
-          <p:cNvPr id="298" name="PlaceHolder 3"/>
+          <p:cNvPr id="296" name="PlaceHolder 3"/>
           <p:cNvSpPr>
             <a:spLocks noGrp="1"/>
           </p:cNvSpPr>
@@ -36370,7 +36322,7 @@
                 <a:tab pos="0" algn="l"/>
               </a:tabLst>
             </a:pPr>
-            <a:fld id="{7BA82DAD-5ABA-4221-AA44-E66952A68240}" type="datetime1">
+            <a:fld id="{2D111D98-D629-4CB6-B93B-D2AB93FF97DE}" type="datetime1">
               <a:rPr lang="en-CA" sz="900" b="1" u="none" strike="noStrike">
                 <a:solidFill>
                   <a:srgbClr val="6D7373"/>
@@ -36380,7 +36332,7 @@
                 <a:latin typeface="SRH Text"/>
                 <a:ea typeface="SRH"/>
               </a:rPr>
-              <a:t>2026-08-13</a:t>
+              <a:t>2026-08-17</a:t>
             </a:fld>
             <a:endParaRPr lang="en-US" sz="900" b="0" u="none" strike="noStrike">
               <a:solidFill>
@@ -36395,7 +36347,7 @@
       </p:sp>
       <p:sp>
         <p:nvSpPr>
-          <p:cNvPr id="299" name="PlaceHolder 4"/>
+          <p:cNvPr id="297" name="PlaceHolder 4"/>
           <p:cNvSpPr>
             <a:spLocks noGrp="1"/>
           </p:cNvSpPr>
@@ -36475,7 +36427,7 @@
       </p:sp>
       <p:sp>
         <p:nvSpPr>
-          <p:cNvPr id="300" name="PlaceHolder 5"/>
+          <p:cNvPr id="298" name="PlaceHolder 5"/>
           <p:cNvSpPr>
             <a:spLocks noGrp="1"/>
           </p:cNvSpPr>
@@ -36530,7 +36482,7 @@
                 <a:tab pos="0" algn="l"/>
               </a:tabLst>
             </a:pPr>
-            <a:fld id="{720B59BD-4CE7-4793-8630-E3BFFC4B070B}" type="slidenum">
+            <a:fld id="{0D85122E-91ED-4AA7-9B16-676292691160}" type="slidenum">
               <a:rPr lang="de-DE" sz="1550" b="1" u="none" strike="noStrike">
                 <a:solidFill>
                   <a:srgbClr val="6D7373"/>
@@ -36540,7 +36492,7 @@
                 <a:latin typeface="SRH Text"/>
                 <a:ea typeface="SRH"/>
               </a:rPr>
-              <a:t>22</a:t>
+              <a:t>&lt;number&gt;</a:t>
             </a:fld>
             <a:endParaRPr lang="en-US" sz="1550" b="0" u="none" strike="noStrike">
               <a:solidFill>
@@ -36553,6 +36505,54 @@
           </a:p>
         </p:txBody>
       </p:sp>
+      <p:pic>
+        <p:nvPicPr>
+          <p:cNvPr id="299" name=""/>
+          <p:cNvPicPr/>
+          <p:nvPr/>
+        </p:nvPicPr>
+        <p:blipFill>
+          <a:blip r:embed="rId1"/>
+          <a:stretch/>
+        </p:blipFill>
+        <p:spPr>
+          <a:xfrm>
+            <a:off x="8229600" y="1371600"/>
+            <a:ext cx="2971800" cy="4572000"/>
+          </a:xfrm>
+          <a:prstGeom prst="rect">
+            <a:avLst/>
+          </a:prstGeom>
+          <a:noFill/>
+          <a:ln w="0">
+            <a:noFill/>
+          </a:ln>
+        </p:spPr>
+      </p:pic>
+      <p:pic>
+        <p:nvPicPr>
+          <p:cNvPr id="300" name=""/>
+          <p:cNvPicPr/>
+          <p:nvPr/>
+        </p:nvPicPr>
+        <p:blipFill>
+          <a:blip r:embed="rId2"/>
+          <a:stretch/>
+        </p:blipFill>
+        <p:spPr>
+          <a:xfrm>
+            <a:off x="84600" y="1333800"/>
+            <a:ext cx="6758640" cy="2323440"/>
+          </a:xfrm>
+          <a:prstGeom prst="rect">
+            <a:avLst/>
+          </a:prstGeom>
+          <a:noFill/>
+          <a:ln w="0">
+            <a:noFill/>
+          </a:ln>
+        </p:spPr>
+      </p:pic>
     </p:spTree>
   </p:cSld>
   <mc:AlternateContent>
@@ -36902,6 +36902,88 @@
             </a:endParaRPr>
           </a:p>
           <a:p>
+            <a:pPr marL="285840" indent="-285840" algn="l" defTabSz="914400">
+              <a:lnSpc>
+                <a:spcPct val="150000"/>
+              </a:lnSpc>
+              <a:spcBef>
+                <a:spcPts val="1191"/>
+              </a:spcBef>
+              <a:spcAft>
+                <a:spcPts val="992"/>
+              </a:spcAft>
+              <a:buClr>
+                <a:srgbClr val="575756"/>
+              </a:buClr>
+              <a:buFont typeface="Wingdings" charset="2"/>
+              <a:buChar char=""/>
+              <a:tabLst>
+                <a:tab pos="0" algn="l"/>
+              </a:tabLst>
+            </a:pPr>
+            <a:r>
+              <a:rPr lang="en-US" sz="1300" b="1" u="none" strike="noStrike">
+                <a:solidFill>
+                  <a:srgbClr val="000000"/>
+                </a:solidFill>
+                <a:effectLst/>
+                <a:uFillTx/>
+                <a:latin typeface="SRH Text"/>
+                <a:ea typeface="SRH Text"/>
+              </a:rPr>
+              <a:t>p(default)&lt; 0.50-→ Approved</a:t>
+            </a:r>
+            <a:endParaRPr lang="de-DE" sz="1300" b="0" u="none" strike="noStrike">
+              <a:solidFill>
+                <a:schemeClr val="dk1"/>
+              </a:solidFill>
+              <a:effectLst/>
+              <a:uFillTx/>
+              <a:latin typeface="SRH Text"/>
+            </a:endParaRPr>
+          </a:p>
+          <a:p>
+            <a:pPr marL="285840" indent="-285840" algn="l" defTabSz="914400">
+              <a:lnSpc>
+                <a:spcPct val="150000"/>
+              </a:lnSpc>
+              <a:spcBef>
+                <a:spcPts val="1191"/>
+              </a:spcBef>
+              <a:spcAft>
+                <a:spcPts val="992"/>
+              </a:spcAft>
+              <a:buClr>
+                <a:srgbClr val="575756"/>
+              </a:buClr>
+              <a:buFont typeface="Wingdings" charset="2"/>
+              <a:buChar char=""/>
+              <a:tabLst>
+                <a:tab pos="0" algn="l"/>
+              </a:tabLst>
+            </a:pPr>
+            <a:r>
+              <a:rPr lang="en-US" sz="1300" b="1" u="none" strike="noStrike">
+                <a:solidFill>
+                  <a:srgbClr val="000000"/>
+                </a:solidFill>
+                <a:effectLst/>
+                <a:uFillTx/>
+                <a:latin typeface="SRH Text"/>
+                <a:ea typeface="SRH Text"/>
+              </a:rPr>
+              <a:t>p(default)&gt; 0.50-→ Rejected</a:t>
+            </a:r>
+            <a:endParaRPr lang="de-DE" sz="1300" b="0" u="none" strike="noStrike">
+              <a:solidFill>
+                <a:schemeClr val="dk1"/>
+              </a:solidFill>
+              <a:effectLst/>
+              <a:uFillTx/>
+              <a:latin typeface="SRH Text"/>
+            </a:endParaRPr>
+          </a:p>
+          <a:p>
             <a:pPr marL="285840" indent="0" algn="l" defTabSz="914400">
               <a:lnSpc>
                 <a:spcPct val="150000"/>
@@ -36985,7 +37067,7 @@
                 <a:tab pos="0" algn="l"/>
               </a:tabLst>
             </a:pPr>
-            <a:fld id="{7E3AFA00-B0BE-4A4E-AE9F-78254403527C}" type="datetime1">
+            <a:fld id="{9C9A9446-940B-44AF-A7CB-F5C24F34FF39}" type="datetime1">
               <a:rPr lang="en-CA" sz="900" b="1" u="none" strike="noStrike">
                 <a:solidFill>
                   <a:srgbClr val="6D7373"/>
@@ -36995,7 +37077,7 @@
                 <a:latin typeface="SRH Text"/>
                 <a:ea typeface="SRH"/>
               </a:rPr>
-              <a:t>2026-08-13</a:t>
+              <a:t>2026-08-17</a:t>
             </a:fld>
             <a:endParaRPr lang="en-US" sz="900" b="0" u="none" strike="noStrike">
               <a:solidFill>
@@ -37145,7 +37227,7 @@
                 <a:tab pos="0" algn="l"/>
               </a:tabLst>
             </a:pPr>
-            <a:fld id="{A99F5CB8-2F6F-4840-8A4A-858281897B1C}" type="slidenum">
+            <a:fld id="{AE9AF780-73A6-45E5-A32B-1421B7133987}" type="slidenum">
               <a:rPr lang="de-DE" sz="1550" b="1" u="none" strike="noStrike">
                 <a:solidFill>
                   <a:srgbClr val="6D7373"/>
@@ -37155,7 +37237,7 @@
                 <a:latin typeface="SRH Text"/>
                 <a:ea typeface="SRH"/>
               </a:rPr>
-              <a:t>22</a:t>
+              <a:t>&lt;number&gt;</a:t>
             </a:fld>
             <a:endParaRPr lang="en-US" sz="1550" b="0" u="none" strike="noStrike">
               <a:solidFill>
@@ -37619,7 +37701,7 @@
                 <a:tab pos="0" algn="l"/>
               </a:tabLst>
             </a:pPr>
-            <a:fld id="{9956B4C7-A8AA-473D-9E62-0E64CD8ADD47}" type="datetime1">
+            <a:fld id="{7F5FDCE2-903D-4E3F-8B87-656B394DD5AD}" type="datetime1">
               <a:rPr lang="en-CA" sz="900" b="1" u="none" strike="noStrike">
                 <a:solidFill>
                   <a:srgbClr val="6D7373"/>
@@ -37629,7 +37711,7 @@
                 <a:latin typeface="SRH Text"/>
                 <a:ea typeface="SRH"/>
               </a:rPr>
-              <a:t>2026-08-13</a:t>
+              <a:t>2026-08-17</a:t>
             </a:fld>
             <a:endParaRPr lang="en-US" sz="900" b="0" u="none" strike="noStrike">
               <a:solidFill>
@@ -37779,7 +37861,7 @@
                 <a:tab pos="0" algn="l"/>
               </a:tabLst>
             </a:pPr>
-            <a:fld id="{C3E9F03D-8C4F-4145-BA55-69E818BF5F3F}" type="slidenum">
+            <a:fld id="{F9974562-DDFB-402C-BE0A-416F0A229207}" type="slidenum">
               <a:rPr lang="de-DE" sz="1550" b="1" u="none" strike="noStrike">
                 <a:solidFill>
                   <a:srgbClr val="6D7373"/>
@@ -37789,7 +37871,7 @@
                 <a:latin typeface="SRH Text"/>
                 <a:ea typeface="SRH"/>
               </a:rPr>
-              <a:t>22</a:t>
+              <a:t>&lt;number&gt;</a:t>
             </a:fld>
             <a:endParaRPr lang="en-US" sz="1550" b="0" u="none" strike="noStrike">
               <a:solidFill>
@@ -38305,7 +38387,7 @@
                 <a:tab pos="0" algn="l"/>
               </a:tabLst>
             </a:pPr>
-            <a:fld id="{336F8601-D17D-436F-B018-1735B9771A0E}" type="datetime1">
+            <a:fld id="{124F2BA0-B4BB-4A2E-8482-2FE20BCC4873}" type="datetime1">
               <a:rPr lang="en-CA" sz="900" b="1" u="none" strike="noStrike">
                 <a:solidFill>
                   <a:srgbClr val="6D7373"/>
@@ -38315,7 +38397,7 @@
                 <a:latin typeface="SRH Text"/>
                 <a:ea typeface="SRH"/>
               </a:rPr>
-              <a:t>2026-08-13</a:t>
+              <a:t>2026-08-17</a:t>
             </a:fld>
             <a:endParaRPr lang="en-US" sz="900" b="0" u="none" strike="noStrike">
               <a:solidFill>
@@ -38465,7 +38547,7 @@
                 <a:tab pos="0" algn="l"/>
               </a:tabLst>
             </a:pPr>
-            <a:fld id="{DA4F8C78-A72A-4560-9B3D-F41A4167E96C}" type="slidenum">
+            <a:fld id="{AE204C8D-ADFA-4FDD-9856-CE360C19B6C6}" type="slidenum">
               <a:rPr lang="de-DE" sz="1550" b="1" u="none" strike="noStrike">
                 <a:solidFill>
                   <a:srgbClr val="6D7373"/>
@@ -38475,7 +38557,7 @@
                 <a:latin typeface="SRH Text"/>
                 <a:ea typeface="SRH"/>
               </a:rPr>
-              <a:t>22</a:t>
+              <a:t>&lt;number&gt;</a:t>
             </a:fld>
             <a:endParaRPr lang="en-US" sz="1550" b="0" u="none" strike="noStrike">
               <a:solidFill>
@@ -38979,7 +39061,7 @@
                 <a:tab pos="0" algn="l"/>
               </a:tabLst>
             </a:pPr>
-            <a:fld id="{140CAEED-8125-4838-BDF8-EBFD794C04E4}" type="datetime1">
+            <a:fld id="{F767F30C-23B6-4F25-ACB8-C1106FBA7867}" type="datetime1">
               <a:rPr lang="en-CA" sz="900" b="1" u="none" strike="noStrike">
                 <a:solidFill>
                   <a:srgbClr val="6D7373"/>
@@ -38989,7 +39071,7 @@
                 <a:latin typeface="SRH Text"/>
                 <a:ea typeface="SRH"/>
               </a:rPr>
-              <a:t>2026-08-13</a:t>
+              <a:t>2026-08-17</a:t>
             </a:fld>
             <a:endParaRPr lang="en-US" sz="900" b="0" u="none" strike="noStrike">
               <a:solidFill>
@@ -39139,7 +39221,7 @@
                 <a:tab pos="0" algn="l"/>
               </a:tabLst>
             </a:pPr>
-            <a:fld id="{D23B90B2-8AF0-4B46-BACF-83A46CD57380}" type="slidenum">
+            <a:fld id="{4C09B8EB-FC08-49AE-A194-00A545D7BB35}" type="slidenum">
               <a:rPr lang="de-DE" sz="1550" b="1" u="none" strike="noStrike">
                 <a:solidFill>
                   <a:srgbClr val="6D7373"/>
@@ -39149,7 +39231,7 @@
                 <a:latin typeface="SRH Text"/>
                 <a:ea typeface="SRH"/>
               </a:rPr>
-              <a:t>22</a:t>
+              <a:t>&lt;number&gt;</a:t>
             </a:fld>
             <a:endParaRPr lang="en-US" sz="1550" b="0" u="none" strike="noStrike">
               <a:solidFill>
@@ -39846,7 +39928,7 @@
                 <a:tab pos="0" algn="l"/>
               </a:tabLst>
             </a:pPr>
-            <a:fld id="{08CDFED4-87E8-41DF-8E08-8177605DA70E}" type="datetime1">
+            <a:fld id="{507B842F-13D7-472C-8877-4FA75A42C660}" type="datetime1">
               <a:rPr lang="en-CA" sz="900" b="1" u="none" strike="noStrike">
                 <a:solidFill>
                   <a:srgbClr val="6D7373"/>
@@ -39856,7 +39938,7 @@
                 <a:latin typeface="SRH Text"/>
                 <a:ea typeface="SRH"/>
               </a:rPr>
-              <a:t>2026-08-13</a:t>
+              <a:t>2026-08-17</a:t>
             </a:fld>
             <a:endParaRPr lang="en-US" sz="900" b="0" u="none" strike="noStrike">
               <a:solidFill>
@@ -40006,7 +40088,7 @@
                 <a:tab pos="0" algn="l"/>
               </a:tabLst>
             </a:pPr>
-            <a:fld id="{B10C9C9F-ADAB-412A-BB9A-2D4CFF07E943}" type="slidenum">
+            <a:fld id="{B80B60EF-1278-45F5-9B72-2EAC45749611}" type="slidenum">
               <a:rPr lang="de-DE" sz="1550" b="1" u="none" strike="noStrike">
                 <a:solidFill>
                   <a:srgbClr val="6D7373"/>
@@ -40016,7 +40098,7 @@
                 <a:latin typeface="SRH Text"/>
                 <a:ea typeface="SRH"/>
               </a:rPr>
-              <a:t>22</a:t>
+              <a:t>&lt;number&gt;</a:t>
             </a:fld>
             <a:endParaRPr lang="en-US" sz="1550" b="0" u="none" strike="noStrike">
               <a:solidFill>
@@ -40580,7 +40662,7 @@
                 <a:tab pos="0" algn="l"/>
               </a:tabLst>
             </a:pPr>
-            <a:fld id="{8E94967B-35FC-4D61-BCB7-52C150BF9CDB}" type="datetime1">
+            <a:fld id="{A44FD13A-D868-4165-9926-ECEF2A3AF7E1}" type="datetime1">
               <a:rPr lang="en-CA" sz="900" b="1" u="none" strike="noStrike">
                 <a:solidFill>
                   <a:srgbClr val="6D7373"/>
@@ -40590,7 +40672,7 @@
                 <a:latin typeface="SRH Text"/>
                 <a:ea typeface="SRH"/>
               </a:rPr>
-              <a:t>2026-08-13</a:t>
+              <a:t>2026-08-17</a:t>
             </a:fld>
             <a:endParaRPr lang="en-US" sz="900" b="0" u="none" strike="noStrike">
               <a:solidFill>
@@ -40740,7 +40822,7 @@
                 <a:tab pos="0" algn="l"/>
               </a:tabLst>
             </a:pPr>
-            <a:fld id="{11D25383-635C-4A00-A108-033F57A03C4A}" type="slidenum">
+            <a:fld id="{9A1D1396-4620-4D04-9A9E-E2240E5D2949}" type="slidenum">
               <a:rPr lang="de-DE" sz="1550" b="1" u="none" strike="noStrike">
                 <a:solidFill>
                   <a:srgbClr val="6D7373"/>
@@ -40750,7 +40832,7 @@
                 <a:latin typeface="SRH Text"/>
                 <a:ea typeface="SRH"/>
               </a:rPr>
-              <a:t>22</a:t>
+              <a:t>&lt;number&gt;</a:t>
             </a:fld>
             <a:endParaRPr lang="en-US" sz="1550" b="0" u="none" strike="noStrike">
               <a:solidFill>
@@ -41671,7 +41753,7 @@
                 <a:tab pos="0" algn="l"/>
               </a:tabLst>
             </a:pPr>
-            <a:fld id="{DDC033AD-3AFA-4524-99F4-AD93705FD0DB}" type="datetime1">
+            <a:fld id="{D771D3EB-EDD9-435C-9F71-55DF1EC2DCE9}" type="datetime1">
               <a:rPr lang="en-CA" sz="900" b="1" u="none" strike="noStrike">
                 <a:solidFill>
                   <a:srgbClr val="6D7373"/>
@@ -41681,7 +41763,7 @@
                 <a:latin typeface="SRH Text"/>
                 <a:ea typeface="SRH"/>
               </a:rPr>
-              <a:t>2026-08-13</a:t>
+              <a:t>2026-08-17</a:t>
             </a:fld>
             <a:endParaRPr lang="en-US" sz="900" b="0" u="none" strike="noStrike">
               <a:solidFill>
@@ -41831,7 +41913,7 @@
                 <a:tab pos="0" algn="l"/>
               </a:tabLst>
             </a:pPr>
-            <a:fld id="{15BDCF3F-10BE-4AB3-9237-6F38AE922FBB}" type="slidenum">
+            <a:fld id="{D19AC313-CFA8-4743-B3C1-A86F41D1562D}" type="slidenum">
               <a:rPr lang="de-DE" sz="1550" b="1" u="none" strike="noStrike">
                 <a:solidFill>
                   <a:srgbClr val="6D7373"/>
@@ -41841,7 +41923,7 @@
                 <a:latin typeface="SRH Text"/>
                 <a:ea typeface="SRH"/>
               </a:rPr>
-              <a:t>22</a:t>
+              <a:t>&lt;number&gt;</a:t>
             </a:fld>
             <a:endParaRPr lang="en-US" sz="1550" b="0" u="none" strike="noStrike">
               <a:solidFill>
@@ -42504,7 +42586,7 @@
                 <a:tab pos="0" algn="l"/>
               </a:tabLst>
             </a:pPr>
-            <a:fld id="{0BC9A2CC-1D79-426D-A840-AD2EE7EE1F46}" type="datetime1">
+            <a:fld id="{19DB6D6A-03F7-4651-9BF0-3DB57CD1BFD5}" type="datetime1">
               <a:rPr lang="en-CA" sz="900" b="1" u="none" strike="noStrike">
                 <a:solidFill>
                   <a:srgbClr val="6D7373"/>
@@ -42514,7 +42596,7 @@
                 <a:latin typeface="SRH Text"/>
                 <a:ea typeface="SRH"/>
               </a:rPr>
-              <a:t>2026-08-13</a:t>
+              <a:t>2026-08-17</a:t>
             </a:fld>
             <a:endParaRPr lang="en-US" sz="900" b="0" u="none" strike="noStrike">
               <a:solidFill>
@@ -42664,7 +42746,7 @@
                 <a:tab pos="0" algn="l"/>
               </a:tabLst>
             </a:pPr>
-            <a:fld id="{728CEEE5-F517-439D-9221-BB4459176113}" type="slidenum">
+            <a:fld id="{9910D55A-9757-4C56-8FDD-D002587B2A74}" type="slidenum">
               <a:rPr lang="de-DE" sz="1550" b="1" u="none" strike="noStrike">
                 <a:solidFill>
                   <a:srgbClr val="6D7373"/>
@@ -42674,7 +42756,7 @@
                 <a:latin typeface="SRH Text"/>
                 <a:ea typeface="SRH"/>
               </a:rPr>
-              <a:t>22</a:t>
+              <a:t>&lt;number&gt;</a:t>
             </a:fld>
             <a:endParaRPr lang="en-US" sz="1550" b="0" u="none" strike="noStrike">
               <a:solidFill>
@@ -42840,7 +42922,7 @@
                 <a:tab pos="0" algn="l"/>
               </a:tabLst>
             </a:pPr>
-            <a:fld id="{6D1DCFB4-23C1-4A05-B56D-A17C2FCA0C1F}" type="datetime1">
+            <a:fld id="{619FBA77-14EC-4981-8AB0-5D9A58932C4C}" type="datetime1">
               <a:rPr lang="en-CA" sz="900" b="1" u="none" strike="noStrike">
                 <a:solidFill>
                   <a:srgbClr val="6D7373"/>
@@ -42850,7 +42932,7 @@
                 <a:latin typeface="SRH Text"/>
                 <a:ea typeface="SRH"/>
               </a:rPr>
-              <a:t>2026-08-13</a:t>
+              <a:t>2026-08-17</a:t>
             </a:fld>
             <a:endParaRPr lang="en-US" sz="900" b="0" u="none" strike="noStrike">
               <a:solidFill>
@@ -43000,7 +43082,7 @@
                 <a:tab pos="0" algn="l"/>
               </a:tabLst>
             </a:pPr>
-            <a:fld id="{7A9D4221-D5A8-40F1-BCA1-043C733CEA23}" type="slidenum">
+            <a:fld id="{FAB4349F-212C-48CF-921F-AC3610F8B8B4}" type="slidenum">
               <a:rPr lang="de-DE" sz="1550" b="1" u="none" strike="noStrike">
                 <a:solidFill>
                   <a:srgbClr val="6D7373"/>
@@ -43010,7 +43092,7 @@
                 <a:latin typeface="SRH Text"/>
                 <a:ea typeface="SRH"/>
               </a:rPr>
-              <a:t>22</a:t>
+              <a:t>&lt;number&gt;</a:t>
             </a:fld>
             <a:endParaRPr lang="en-US" sz="1550" b="0" u="none" strike="noStrike">
               <a:solidFill>
@@ -43649,7 +43731,7 @@
                 <a:tab pos="0" algn="l"/>
               </a:tabLst>
             </a:pPr>
-            <a:fld id="{80189DD2-DCE6-4F34-A023-31604F2D91A6}" type="datetime1">
+            <a:fld id="{13C16CAF-18AF-4894-869D-41D599F6B0E7}" type="datetime1">
               <a:rPr lang="en-CA" sz="900" b="1" u="none" strike="noStrike">
                 <a:solidFill>
                   <a:srgbClr val="6D7373"/>
@@ -43659,7 +43741,7 @@
                 <a:latin typeface="SRH Text"/>
                 <a:ea typeface="SRH"/>
               </a:rPr>
-              <a:t>2026-08-13</a:t>
+              <a:t>2026-08-17</a:t>
             </a:fld>
             <a:endParaRPr lang="en-US" sz="900" b="0" u="none" strike="noStrike">
               <a:solidFill>
@@ -43809,7 +43891,7 @@
                 <a:tab pos="0" algn="l"/>
               </a:tabLst>
             </a:pPr>
-            <a:fld id="{ECCCA666-97B5-4B77-8BAC-F8AB496B44EA}" type="slidenum">
+            <a:fld id="{DA833655-49E4-49EA-90A6-686C2D51DAD3}" type="slidenum">
               <a:rPr lang="de-DE" sz="1550" b="1" u="none" strike="noStrike">
                 <a:solidFill>
                   <a:srgbClr val="6D7373"/>
@@ -44755,7 +44837,7 @@
                 <a:tab pos="0" algn="l"/>
               </a:tabLst>
             </a:pPr>
-            <a:fld id="{6CC15646-E83A-4614-A8D2-E60AB40072D2}" type="datetime1">
+            <a:fld id="{DAF11467-EF18-4C60-A951-EEF638A445F2}" type="datetime1">
               <a:rPr lang="en-CA" sz="900" b="1" u="none" strike="noStrike">
                 <a:solidFill>
                   <a:srgbClr val="6D7373"/>
@@ -44765,7 +44847,7 @@
                 <a:latin typeface="SRH Text"/>
                 <a:ea typeface="SRH"/>
               </a:rPr>
-              <a:t>2026-08-13</a:t>
+              <a:t>2026-08-17</a:t>
             </a:fld>
             <a:endParaRPr lang="en-US" sz="900" b="0" u="none" strike="noStrike">
               <a:solidFill>
@@ -44915,7 +44997,7 @@
                 <a:tab pos="0" algn="l"/>
               </a:tabLst>
             </a:pPr>
-            <a:fld id="{D60A6F88-E532-448A-B0C7-C71DA137DE27}" type="slidenum">
+            <a:fld id="{308F66D9-B44E-4788-ADC3-9388CB35D6F8}" type="slidenum">
               <a:rPr lang="de-DE" sz="1550" b="1" u="none" strike="noStrike">
                 <a:solidFill>
                   <a:srgbClr val="6D7373"/>
@@ -45763,7 +45845,7 @@
                 <a:tab pos="0" algn="l"/>
               </a:tabLst>
             </a:pPr>
-            <a:fld id="{D7FC44E8-2FF2-4533-9F8E-E0C19A1C7DF5}" type="datetime1">
+            <a:fld id="{BD227F29-6D4A-44E5-8D9F-FEB6F9121126}" type="datetime1">
               <a:rPr lang="en-CA" sz="900" b="1" u="none" strike="noStrike">
                 <a:solidFill>
                   <a:srgbClr val="6D7373"/>
@@ -45773,7 +45855,7 @@
                 <a:latin typeface="SRH Text"/>
                 <a:ea typeface="SRH"/>
               </a:rPr>
-              <a:t>2026-08-13</a:t>
+              <a:t>2026-08-17</a:t>
             </a:fld>
             <a:endParaRPr lang="en-US" sz="900" b="0" u="none" strike="noStrike">
               <a:solidFill>
@@ -45923,7 +46005,7 @@
                 <a:tab pos="0" algn="l"/>
               </a:tabLst>
             </a:pPr>
-            <a:fld id="{9D668C92-EDAE-42F3-BA0B-ED9F8DE055E2}" type="slidenum">
+            <a:fld id="{28C36679-4649-4B5E-8F77-AF1FD73D4AB7}" type="slidenum">
               <a:rPr lang="de-DE" sz="1550" b="1" u="none" strike="noStrike">
                 <a:solidFill>
                   <a:srgbClr val="6D7373"/>
@@ -46620,7 +46702,7 @@
                 <a:tab pos="0" algn="l"/>
               </a:tabLst>
             </a:pPr>
-            <a:fld id="{F4909233-BE66-494B-B806-87118F6B6D2E}" type="datetime1">
+            <a:fld id="{A1454AEA-558A-443E-8F05-0708B834218C}" type="datetime1">
               <a:rPr lang="en-CA" sz="900" b="1" u="none" strike="noStrike">
                 <a:solidFill>
                   <a:srgbClr val="6D7373"/>
@@ -46630,7 +46712,7 @@
                 <a:latin typeface="SRH Text"/>
                 <a:ea typeface="SRH"/>
               </a:rPr>
-              <a:t>2026-08-13</a:t>
+              <a:t>2026-08-17</a:t>
             </a:fld>
             <a:endParaRPr lang="en-US" sz="900" b="0" u="none" strike="noStrike">
               <a:solidFill>
@@ -46780,7 +46862,7 @@
                 <a:tab pos="0" algn="l"/>
               </a:tabLst>
             </a:pPr>
-            <a:fld id="{FDE3FF72-4605-49EE-8C74-8239E2189EDC}" type="slidenum">
+            <a:fld id="{45C523CE-7110-4E25-B5C2-FC1AAFBE9563}" type="slidenum">
               <a:rPr lang="de-DE" sz="1550" b="1" u="none" strike="noStrike">
                 <a:solidFill>
                   <a:srgbClr val="6D7373"/>
@@ -47420,7 +47502,7 @@
                 <a:tab pos="0" algn="l"/>
               </a:tabLst>
             </a:pPr>
-            <a:fld id="{09F185A7-F3B0-4456-9887-2848C2B70F06}" type="datetime1">
+            <a:fld id="{66DDAACA-BE81-43DB-B5D6-2C017E818603}" type="datetime1">
               <a:rPr lang="en-CA" sz="900" b="1" u="none" strike="noStrike">
                 <a:solidFill>
                   <a:srgbClr val="6D7373"/>
@@ -47430,7 +47512,7 @@
                 <a:latin typeface="SRH Text"/>
                 <a:ea typeface="SRH"/>
               </a:rPr>
-              <a:t>2026-08-13</a:t>
+              <a:t>2026-08-17</a:t>
             </a:fld>
             <a:endParaRPr lang="en-US" sz="900" b="0" u="none" strike="noStrike">
               <a:solidFill>
@@ -47580,7 +47662,7 @@
                 <a:tab pos="0" algn="l"/>
               </a:tabLst>
             </a:pPr>
-            <a:fld id="{5C4A70CB-62C4-474C-8FFC-4D4712605296}" type="slidenum">
+            <a:fld id="{DC706CC0-FBC8-408F-8D2F-D827C76280FF}" type="slidenum">
               <a:rPr lang="de-DE" sz="1550" b="1" u="none" strike="noStrike">
                 <a:solidFill>
                   <a:srgbClr val="6D7373"/>
@@ -47590,7 +47672,7 @@
                 <a:latin typeface="SRH Text"/>
                 <a:ea typeface="SRH"/>
               </a:rPr>
-              <a:t>22</a:t>
+              <a:t>&lt;number&gt;</a:t>
             </a:fld>
             <a:endParaRPr lang="en-US" sz="1550" b="0" u="none" strike="noStrike">
               <a:solidFill>
@@ -48141,7 +48223,7 @@
                 <a:tab pos="0" algn="l"/>
               </a:tabLst>
             </a:pPr>
-            <a:fld id="{FFF36EE3-ACBF-4D54-B9A3-F10DD8FAF6EF}" type="datetime1">
+            <a:fld id="{2B00DA58-E37D-4D11-B23C-DB85E39EB48E}" type="datetime1">
               <a:rPr lang="en-CA" sz="900" b="1" u="none" strike="noStrike">
                 <a:solidFill>
                   <a:srgbClr val="6D7373"/>
@@ -48151,7 +48233,7 @@
                 <a:latin typeface="SRH Text"/>
                 <a:ea typeface="SRH"/>
               </a:rPr>
-              <a:t>2026-08-13</a:t>
+              <a:t>2026-08-17</a:t>
             </a:fld>
             <a:endParaRPr lang="en-US" sz="900" b="0" u="none" strike="noStrike">
               <a:solidFill>
@@ -48301,7 +48383,7 @@
                 <a:tab pos="0" algn="l"/>
               </a:tabLst>
             </a:pPr>
-            <a:fld id="{E8BF7A8C-9A7E-43C1-A375-C050751566DB}" type="slidenum">
+            <a:fld id="{C7E62923-8B28-46A2-AF15-3422792C7252}" type="slidenum">
               <a:rPr lang="de-DE" sz="1550" b="1" u="none" strike="noStrike">
                 <a:solidFill>
                   <a:srgbClr val="6D7373"/>
@@ -48311,7 +48393,7 @@
                 <a:latin typeface="SRH Text"/>
                 <a:ea typeface="SRH"/>
               </a:rPr>
-              <a:t>22</a:t>
+              <a:t>&lt;number&gt;</a:t>
             </a:fld>
             <a:endParaRPr lang="en-US" sz="1550" b="0" u="none" strike="noStrike">
               <a:solidFill>
@@ -48866,7 +48948,7 @@
                 <a:tab pos="0" algn="l"/>
               </a:tabLst>
             </a:pPr>
-            <a:fld id="{A985F413-FDF8-4872-A206-18F6E15CDE78}" type="datetime1">
+            <a:fld id="{CB25EB5F-C303-468D-8AF5-5E71C2877989}" type="datetime1">
               <a:rPr lang="en-CA" sz="900" b="1" u="none" strike="noStrike">
                 <a:solidFill>
                   <a:srgbClr val="6D7373"/>
@@ -48876,7 +48958,7 @@
                 <a:latin typeface="SRH Text"/>
                 <a:ea typeface="SRH"/>
               </a:rPr>
-              <a:t>2026-08-13</a:t>
+              <a:t>2026-08-17</a:t>
             </a:fld>
             <a:endParaRPr lang="en-US" sz="900" b="0" u="none" strike="noStrike">
               <a:solidFill>
@@ -49026,7 +49108,7 @@
                 <a:tab pos="0" algn="l"/>
               </a:tabLst>
             </a:pPr>
-            <a:fld id="{9E95E3AB-BDB1-4803-AC86-8F67224FF39B}" type="slidenum">
+            <a:fld id="{3DC86594-0510-4E2C-9210-A7FEE408B6C7}" type="slidenum">
               <a:rPr lang="de-DE" sz="1550" b="1" u="none" strike="noStrike">
                 <a:solidFill>
                   <a:srgbClr val="6D7373"/>
@@ -49036,7 +49118,7 @@
                 <a:latin typeface="SRH Text"/>
                 <a:ea typeface="SRH"/>
               </a:rPr>
-              <a:t>22</a:t>
+              <a:t>&lt;number&gt;</a:t>
             </a:fld>
             <a:endParaRPr lang="en-US" sz="1550" b="0" u="none" strike="noStrike">
               <a:solidFill>
@@ -49543,7 +49625,7 @@
                 <a:tab pos="0" algn="l"/>
               </a:tabLst>
             </a:pPr>
-            <a:fld id="{6CE2A329-593E-4044-B1EE-13CB216D8803}" type="datetime1">
+            <a:fld id="{3AC9D7D6-4029-4BC8-B545-C9820C3CA27F}" type="datetime1">
               <a:rPr lang="en-CA" sz="900" b="1" u="none" strike="noStrike">
                 <a:solidFill>
                   <a:srgbClr val="6D7373"/>
@@ -49553,7 +49635,7 @@
                 <a:latin typeface="SRH Text"/>
                 <a:ea typeface="SRH"/>
               </a:rPr>
-              <a:t>2026-08-13</a:t>
+              <a:t>2026-08-17</a:t>
             </a:fld>
             <a:endParaRPr lang="en-US" sz="900" b="0" u="none" strike="noStrike">
               <a:solidFill>
@@ -49703,7 +49785,7 @@
                 <a:tab pos="0" algn="l"/>
               </a:tabLst>
             </a:pPr>
-            <a:fld id="{392D00C8-B295-4EA1-8A67-3C80B527BD7E}" type="slidenum">
+            <a:fld id="{00DF8F51-D48F-4F12-AF52-0EEFD89319A3}" type="slidenum">
               <a:rPr lang="de-DE" sz="1550" b="1" u="none" strike="noStrike">
                 <a:solidFill>
                   <a:srgbClr val="6D7373"/>
@@ -49713,7 +49795,7 @@
                 <a:latin typeface="SRH Text"/>
                 <a:ea typeface="SRH"/>
               </a:rPr>
-              <a:t>22</a:t>
+              <a:t>&lt;number&gt;</a:t>
             </a:fld>
             <a:endParaRPr lang="en-US" sz="1550" b="0" u="none" strike="noStrike">
               <a:solidFill>
@@ -50409,7 +50491,7 @@
                 <a:tab pos="0" algn="l"/>
               </a:tabLst>
             </a:pPr>
-            <a:fld id="{F86CA71E-021D-4CE7-9444-246080828ADF}" type="datetime1">
+            <a:fld id="{1613CDD0-7EC6-457C-9188-67CE58CA84C8}" type="datetime1">
               <a:rPr lang="en-CA" sz="900" b="1" u="none" strike="noStrike">
                 <a:solidFill>
                   <a:srgbClr val="6D7373"/>
@@ -50419,7 +50501,7 @@
                 <a:latin typeface="SRH Text"/>
                 <a:ea typeface="SRH"/>
               </a:rPr>
-              <a:t>2026-08-13</a:t>
+              <a:t>2026-08-17</a:t>
             </a:fld>
             <a:endParaRPr lang="en-US" sz="900" b="0" u="none" strike="noStrike">
               <a:solidFill>
@@ -50569,7 +50651,7 @@
                 <a:tab pos="0" algn="l"/>
               </a:tabLst>
             </a:pPr>
-            <a:fld id="{4C5DDC4B-683E-4D18-8FFB-3785A688633E}" type="slidenum">
+            <a:fld id="{70B7EA4F-8F56-4651-A19A-3DAC2CC87AB9}" type="slidenum">
               <a:rPr lang="de-DE" sz="1550" b="1" u="none" strike="noStrike">
                 <a:solidFill>
                   <a:srgbClr val="6D7373"/>
@@ -50579,7 +50661,7 @@
                 <a:latin typeface="SRH Text"/>
                 <a:ea typeface="SRH"/>
               </a:rPr>
-              <a:t>22</a:t>
+              <a:t>&lt;number&gt;</a:t>
             </a:fld>
             <a:endParaRPr lang="en-US" sz="1550" b="0" u="none" strike="noStrike">
               <a:solidFill>
